--- a/public/lessons/year-6-maths/spring/week-15/subtract-decimals/teaching-powerpoint-v1.pptx
+++ b/public/lessons/year-6-maths/spring/week-15/subtract-decimals/teaching-powerpoint-v1.pptx
@@ -2,24 +2,24 @@
 <file path=ppt/presentation.xml><?xml version="1.0" encoding="utf-8"?>
 <p:presentation xmlns:p="http://schemas.openxmlformats.org/presentationml/2006/main">
   <p:sldMasterIdLst>
-    <p:sldMasterId xmlns:r="http://schemas.openxmlformats.org/officeDocument/2006/relationships" id="2147483648" r:id="R8dca4c84882d47c1"/>
+    <p:sldMasterId xmlns:r="http://schemas.openxmlformats.org/officeDocument/2006/relationships" id="2147483648" r:id="Re1378779f95843ba"/>
   </p:sldMasterIdLst>
   <p:notesMasterIdLst>
-    <p:notesMasterId xmlns:r="http://schemas.openxmlformats.org/officeDocument/2006/relationships" r:id="R20a0cc2a69744f46"/>
+    <p:notesMasterId xmlns:r="http://schemas.openxmlformats.org/officeDocument/2006/relationships" r:id="Rd17a0257be234d34"/>
   </p:notesMasterIdLst>
   <p:sldIdLst>
-    <p:sldId xmlns:r="http://schemas.openxmlformats.org/officeDocument/2006/relationships" id="256" r:id="R1ac3cb724764488d"/>
-    <p:sldId xmlns:r="http://schemas.openxmlformats.org/officeDocument/2006/relationships" id="257" r:id="R14091849603c46e0"/>
-    <p:sldId xmlns:r="http://schemas.openxmlformats.org/officeDocument/2006/relationships" id="258" r:id="R79303032c94c49cb"/>
-    <p:sldId xmlns:r="http://schemas.openxmlformats.org/officeDocument/2006/relationships" id="259" r:id="R45546025f13f41df"/>
-    <p:sldId xmlns:r="http://schemas.openxmlformats.org/officeDocument/2006/relationships" id="260" r:id="R8d30d71b570e4b92"/>
-    <p:sldId xmlns:r="http://schemas.openxmlformats.org/officeDocument/2006/relationships" id="261" r:id="R06f95b1eb71946eb"/>
-    <p:sldId xmlns:r="http://schemas.openxmlformats.org/officeDocument/2006/relationships" id="262" r:id="R7bad8e90fce148b2"/>
-    <p:sldId xmlns:r="http://schemas.openxmlformats.org/officeDocument/2006/relationships" id="263" r:id="R1fac07641cb34dab"/>
-    <p:sldId xmlns:r="http://schemas.openxmlformats.org/officeDocument/2006/relationships" id="264" r:id="R8636c5f53b034e85"/>
-    <p:sldId xmlns:r="http://schemas.openxmlformats.org/officeDocument/2006/relationships" id="265" r:id="Re975652e4a4d4484"/>
-    <p:sldId xmlns:r="http://schemas.openxmlformats.org/officeDocument/2006/relationships" id="266" r:id="R89f73b4513d3499e"/>
-    <p:sldId xmlns:r="http://schemas.openxmlformats.org/officeDocument/2006/relationships" id="267" r:id="R8ed3224433594cb0"/>
+    <p:sldId xmlns:r="http://schemas.openxmlformats.org/officeDocument/2006/relationships" id="256" r:id="R7e853d7d2b7043fe"/>
+    <p:sldId xmlns:r="http://schemas.openxmlformats.org/officeDocument/2006/relationships" id="257" r:id="R69d83b46e9174ad7"/>
+    <p:sldId xmlns:r="http://schemas.openxmlformats.org/officeDocument/2006/relationships" id="258" r:id="R8d1e0e8ff2284506"/>
+    <p:sldId xmlns:r="http://schemas.openxmlformats.org/officeDocument/2006/relationships" id="259" r:id="R959334d089e7486d"/>
+    <p:sldId xmlns:r="http://schemas.openxmlformats.org/officeDocument/2006/relationships" id="260" r:id="Rb07403920543432c"/>
+    <p:sldId xmlns:r="http://schemas.openxmlformats.org/officeDocument/2006/relationships" id="261" r:id="Rae7c86cd9c5d43ca"/>
+    <p:sldId xmlns:r="http://schemas.openxmlformats.org/officeDocument/2006/relationships" id="262" r:id="R4d4eb54a855c42b0"/>
+    <p:sldId xmlns:r="http://schemas.openxmlformats.org/officeDocument/2006/relationships" id="263" r:id="R2a22a8940cd540e2"/>
+    <p:sldId xmlns:r="http://schemas.openxmlformats.org/officeDocument/2006/relationships" id="264" r:id="Raa95d6ba41bf464f"/>
+    <p:sldId xmlns:r="http://schemas.openxmlformats.org/officeDocument/2006/relationships" id="265" r:id="R3e5b38bdcba84b40"/>
+    <p:sldId xmlns:r="http://schemas.openxmlformats.org/officeDocument/2006/relationships" id="266" r:id="R17715e11478b48b5"/>
+    <p:sldId xmlns:r="http://schemas.openxmlformats.org/officeDocument/2006/relationships" id="267" r:id="Rb75f4c9b4c9244a5"/>
   </p:sldIdLst>
   <p:sldSz cx="12192000" cy="6858000"/>
   <p:notesSz cx="6858000" cy="9144000"/>
@@ -873,7 +873,7 @@
           <a:lstStyle xmlns:a="http://schemas.openxmlformats.org/drawingml/2006/main"/>
           <a:p xmlns:a="http://schemas.openxmlformats.org/drawingml/2006/main">
             <a:r>
-              <a:t>I do. Reveal the question, setup and each calculation stage one click at a time. Pupils watch before copying. Model answer: 32.515.</a:t>
+              <a:t>I do. Reveal the question, then reveal each mathematical change one click at a time. Point to the numbers and operation that changed before moving to the next line. Final answer: 32.515.</a:t>
             </a:r>
           </a:p>
         </p:txBody>
@@ -1291,7 +1291,7 @@
   </p:cSld>
   <p:clrMap bg1="lt1" tx1="dk1" bg2="lt2" tx2="dk2" accent1="accent1" accent2="accent2" accent3="accent3" accent4="accent4" accent5="accent5" accent6="accent6" hlink="hlink" folHlink="folHlink"/>
   <p:sldLayoutIdLst>
-    <p:sldLayoutId xmlns:r="http://schemas.openxmlformats.org/officeDocument/2006/relationships" id="2147483649" r:id="Rb2d7fb3c8fdd414b"/>
+    <p:sldLayoutId xmlns:r="http://schemas.openxmlformats.org/officeDocument/2006/relationships" id="2147483649" r:id="Reff456505c9941e1"/>
   </p:sldLayoutIdLst>
   <p:txStyles>
     <p:titleStyle>
@@ -1842,7 +1842,7 @@
           <p:cNvPr id="12" name="">
             <a:extLst xmlns:a="http://schemas.openxmlformats.org/drawingml/2006/main">
               <a:ext uri="{FF2B5EF4-FFF2-40B4-BE49-F238E27FC236}">
-                <a16:creationId xmlns:a16="http://schemas.microsoft.com/office/drawing/2014/main" id="{64AE76C4-B4AA-468C-ABA1-B881EF9FF0C8}"/>
+                <a16:creationId xmlns:a16="http://schemas.microsoft.com/office/drawing/2014/main" id="{DCBE05DC-C1A4-4111-8E54-8830F803B361}"/>
               </a:ext>
             </a:extLst>
           </p:cNvPr>
@@ -1874,7 +1874,7 @@
           <p:cNvPr id="2" name="">
             <a:extLst xmlns:a="http://schemas.openxmlformats.org/drawingml/2006/main">
               <a:ext uri="{FF2B5EF4-FFF2-40B4-BE49-F238E27FC236}">
-                <a16:creationId xmlns:a16="http://schemas.microsoft.com/office/drawing/2014/main" id="{49D884E0-48A7-4EA9-94D3-B590F57907F9}"/>
+                <a16:creationId xmlns:a16="http://schemas.microsoft.com/office/drawing/2014/main" id="{ED754E18-4DA5-4B89-BE36-F5DBF43FD1DD}"/>
               </a:ext>
             </a:extLst>
           </p:cNvPr>
@@ -1931,7 +1931,7 @@
           <p:cNvPr id="3" name="">
             <a:extLst xmlns:a="http://schemas.openxmlformats.org/drawingml/2006/main">
               <a:ext uri="{FF2B5EF4-FFF2-40B4-BE49-F238E27FC236}">
-                <a16:creationId xmlns:a16="http://schemas.microsoft.com/office/drawing/2014/main" id="{1E5E2F47-3B20-445A-80D6-4281E8CBD3BB}"/>
+                <a16:creationId xmlns:a16="http://schemas.microsoft.com/office/drawing/2014/main" id="{09569207-33B1-437A-B743-9E4B496F2494}"/>
               </a:ext>
             </a:extLst>
           </p:cNvPr>
@@ -1965,7 +1965,7 @@
           <p:cNvPr id="4" name="">
             <a:extLst xmlns:a="http://schemas.openxmlformats.org/drawingml/2006/main">
               <a:ext uri="{FF2B5EF4-FFF2-40B4-BE49-F238E27FC236}">
-                <a16:creationId xmlns:a16="http://schemas.microsoft.com/office/drawing/2014/main" id="{16EBA54F-7ABE-4AB1-8E86-045A048BECB7}"/>
+                <a16:creationId xmlns:a16="http://schemas.microsoft.com/office/drawing/2014/main" id="{28648A6E-C2F9-4032-B219-78EB70BBADBD}"/>
               </a:ext>
             </a:extLst>
           </p:cNvPr>
@@ -2022,7 +2022,7 @@
           <p:cNvPr id="5" name="">
             <a:extLst xmlns:a="http://schemas.openxmlformats.org/drawingml/2006/main">
               <a:ext uri="{FF2B5EF4-FFF2-40B4-BE49-F238E27FC236}">
-                <a16:creationId xmlns:a16="http://schemas.microsoft.com/office/drawing/2014/main" id="{8A542C36-52C8-4667-BCE8-CCE1EF2F5DF5}"/>
+                <a16:creationId xmlns:a16="http://schemas.microsoft.com/office/drawing/2014/main" id="{30C00A13-A871-4644-851E-8E8EED546EFD}"/>
               </a:ext>
             </a:extLst>
           </p:cNvPr>
@@ -2079,7 +2079,7 @@
           <p:cNvPr id="6" name="">
             <a:extLst xmlns:a="http://schemas.openxmlformats.org/drawingml/2006/main">
               <a:ext uri="{FF2B5EF4-FFF2-40B4-BE49-F238E27FC236}">
-                <a16:creationId xmlns:a16="http://schemas.microsoft.com/office/drawing/2014/main" id="{DF36288B-85ED-4C6C-A60D-B6F48CA078A1}"/>
+                <a16:creationId xmlns:a16="http://schemas.microsoft.com/office/drawing/2014/main" id="{DA6D67C5-2D91-4F09-974A-06300F65D701}"/>
               </a:ext>
             </a:extLst>
           </p:cNvPr>
@@ -2113,7 +2113,7 @@
           <p:cNvPr id="7" name="">
             <a:extLst xmlns:a="http://schemas.openxmlformats.org/drawingml/2006/main">
               <a:ext uri="{FF2B5EF4-FFF2-40B4-BE49-F238E27FC236}">
-                <a16:creationId xmlns:a16="http://schemas.microsoft.com/office/drawing/2014/main" id="{8C65891A-0C21-4F91-A229-54A3319EE84B}"/>
+                <a16:creationId xmlns:a16="http://schemas.microsoft.com/office/drawing/2014/main" id="{6548AEDD-CA96-4F8C-ABA1-CEBDC0F4BFE4}"/>
               </a:ext>
             </a:extLst>
           </p:cNvPr>
@@ -2170,7 +2170,7 @@
           <p:cNvPr id="8" name="">
             <a:extLst xmlns:a="http://schemas.openxmlformats.org/drawingml/2006/main">
               <a:ext uri="{FF2B5EF4-FFF2-40B4-BE49-F238E27FC236}">
-                <a16:creationId xmlns:a16="http://schemas.microsoft.com/office/drawing/2014/main" id="{AC714C68-BA8A-4C99-BF5E-A0A7B2A0A2EF}"/>
+                <a16:creationId xmlns:a16="http://schemas.microsoft.com/office/drawing/2014/main" id="{12FD9084-509B-4719-8455-E263D7F1B7BB}"/>
               </a:ext>
             </a:extLst>
           </p:cNvPr>
@@ -2227,7 +2227,7 @@
           <p:cNvPr id="9" name="">
             <a:extLst xmlns:a="http://schemas.openxmlformats.org/drawingml/2006/main">
               <a:ext uri="{FF2B5EF4-FFF2-40B4-BE49-F238E27FC236}">
-                <a16:creationId xmlns:a16="http://schemas.microsoft.com/office/drawing/2014/main" id="{5E9D86C5-5B3D-4142-9185-F3C81E9CE279}"/>
+                <a16:creationId xmlns:a16="http://schemas.microsoft.com/office/drawing/2014/main" id="{A22D621C-96D3-4235-AC83-FDD93D4668AD}"/>
               </a:ext>
             </a:extLst>
           </p:cNvPr>
@@ -2284,7 +2284,7 @@
           <p:cNvPr id="10" name="">
             <a:extLst xmlns:a="http://schemas.openxmlformats.org/drawingml/2006/main">
               <a:ext uri="{FF2B5EF4-FFF2-40B4-BE49-F238E27FC236}">
-                <a16:creationId xmlns:a16="http://schemas.microsoft.com/office/drawing/2014/main" id="{64BAE7AB-4E19-47BA-A529-3FBEAD4FD722}"/>
+                <a16:creationId xmlns:a16="http://schemas.microsoft.com/office/drawing/2014/main" id="{0BC60679-8122-4DF5-AB55-6FEF7EC20B59}"/>
               </a:ext>
             </a:extLst>
           </p:cNvPr>
@@ -2341,7 +2341,7 @@
           <p:cNvPr id="11" name="">
             <a:extLst xmlns:a="http://schemas.openxmlformats.org/drawingml/2006/main">
               <a:ext uri="{FF2B5EF4-FFF2-40B4-BE49-F238E27FC236}">
-                <a16:creationId xmlns:a16="http://schemas.microsoft.com/office/drawing/2014/main" id="{0CB8A79D-EE58-45B0-A388-F636352279B7}"/>
+                <a16:creationId xmlns:a16="http://schemas.microsoft.com/office/drawing/2014/main" id="{C5F721D6-C862-43B7-B4C7-9C4FC7F87D15}"/>
               </a:ext>
             </a:extLst>
           </p:cNvPr>
@@ -2396,7 +2396,7 @@
     </p:spTree>
     <p:extLst>
       <p:ext uri="{BB962C8B-B14F-4D97-AF65-F5344CB8AC3E}">
-        <p14:creationId xmlns:p14="http://schemas.microsoft.com/office/powerpoint/2010/main" val="1617511139"/>
+        <p14:creationId xmlns:p14="http://schemas.microsoft.com/office/powerpoint/2010/main" val="1503837690"/>
       </p:ext>
     </p:extLst>
   </p:cSld>
@@ -2427,7 +2427,7 @@
           <p:cNvPr id="14" name="">
             <a:extLst xmlns:a="http://schemas.openxmlformats.org/drawingml/2006/main">
               <a:ext uri="{FF2B5EF4-FFF2-40B4-BE49-F238E27FC236}">
-                <a16:creationId xmlns:a16="http://schemas.microsoft.com/office/drawing/2014/main" id="{00CBA150-D848-4A91-A5B7-88563397730F}"/>
+                <a16:creationId xmlns:a16="http://schemas.microsoft.com/office/drawing/2014/main" id="{364BB0D6-2EE0-4017-A0F5-79312D83A9A1}"/>
               </a:ext>
             </a:extLst>
           </p:cNvPr>
@@ -2459,7 +2459,7 @@
           <p:cNvPr id="2" name="">
             <a:extLst xmlns:a="http://schemas.openxmlformats.org/drawingml/2006/main">
               <a:ext uri="{FF2B5EF4-FFF2-40B4-BE49-F238E27FC236}">
-                <a16:creationId xmlns:a16="http://schemas.microsoft.com/office/drawing/2014/main" id="{9D7A536C-F3A2-45B9-9C4F-877442B1E3C7}"/>
+                <a16:creationId xmlns:a16="http://schemas.microsoft.com/office/drawing/2014/main" id="{B14517B5-B48E-490D-BB0D-5D492160C038}"/>
               </a:ext>
             </a:extLst>
           </p:cNvPr>
@@ -2516,7 +2516,7 @@
           <p:cNvPr id="3" name="">
             <a:extLst xmlns:a="http://schemas.openxmlformats.org/drawingml/2006/main">
               <a:ext uri="{FF2B5EF4-FFF2-40B4-BE49-F238E27FC236}">
-                <a16:creationId xmlns:a16="http://schemas.microsoft.com/office/drawing/2014/main" id="{FDD16D07-A513-43E0-A09C-A443BCF0FE15}"/>
+                <a16:creationId xmlns:a16="http://schemas.microsoft.com/office/drawing/2014/main" id="{C15FC00B-4982-4274-A6CB-3570241A5E15}"/>
               </a:ext>
             </a:extLst>
           </p:cNvPr>
@@ -2548,7 +2548,7 @@
           <p:cNvPr id="4" name="">
             <a:extLst xmlns:a="http://schemas.openxmlformats.org/drawingml/2006/main">
               <a:ext uri="{FF2B5EF4-FFF2-40B4-BE49-F238E27FC236}">
-                <a16:creationId xmlns:a16="http://schemas.microsoft.com/office/drawing/2014/main" id="{01804DA1-5A8E-421B-8A3C-51EE62FE46BF}"/>
+                <a16:creationId xmlns:a16="http://schemas.microsoft.com/office/drawing/2014/main" id="{B2DE325F-4DEA-4430-90D3-D609D259FC2E}"/>
               </a:ext>
             </a:extLst>
           </p:cNvPr>
@@ -2605,7 +2605,7 @@
           <p:cNvPr id="5" name="">
             <a:extLst xmlns:a="http://schemas.openxmlformats.org/drawingml/2006/main">
               <a:ext uri="{FF2B5EF4-FFF2-40B4-BE49-F238E27FC236}">
-                <a16:creationId xmlns:a16="http://schemas.microsoft.com/office/drawing/2014/main" id="{C85FEE7F-24FF-493C-87E2-297F780CFCB9}"/>
+                <a16:creationId xmlns:a16="http://schemas.microsoft.com/office/drawing/2014/main" id="{51CAA6F4-AFF5-4144-A8D8-B9C5D4753C68}"/>
               </a:ext>
             </a:extLst>
           </p:cNvPr>
@@ -2662,7 +2662,7 @@
           <p:cNvPr id="6" name="">
             <a:extLst xmlns:a="http://schemas.openxmlformats.org/drawingml/2006/main">
               <a:ext uri="{FF2B5EF4-FFF2-40B4-BE49-F238E27FC236}">
-                <a16:creationId xmlns:a16="http://schemas.microsoft.com/office/drawing/2014/main" id="{061DEFAC-1840-49D7-91CB-F476EC006304}"/>
+                <a16:creationId xmlns:a16="http://schemas.microsoft.com/office/drawing/2014/main" id="{2E331B0A-8099-44D4-8DC5-ECBF74F7A485}"/>
               </a:ext>
             </a:extLst>
           </p:cNvPr>
@@ -2719,7 +2719,7 @@
           <p:cNvPr id="7" name="">
             <a:extLst xmlns:a="http://schemas.openxmlformats.org/drawingml/2006/main">
               <a:ext uri="{FF2B5EF4-FFF2-40B4-BE49-F238E27FC236}">
-                <a16:creationId xmlns:a16="http://schemas.microsoft.com/office/drawing/2014/main" id="{E5631951-8F07-48A3-80C7-A6292C93DD09}"/>
+                <a16:creationId xmlns:a16="http://schemas.microsoft.com/office/drawing/2014/main" id="{B08AF7D5-3868-4CE4-9336-80D4033D71D9}"/>
               </a:ext>
             </a:extLst>
           </p:cNvPr>
@@ -2751,7 +2751,7 @@
           <p:cNvPr id="8" name="">
             <a:extLst xmlns:a="http://schemas.openxmlformats.org/drawingml/2006/main">
               <a:ext uri="{FF2B5EF4-FFF2-40B4-BE49-F238E27FC236}">
-                <a16:creationId xmlns:a16="http://schemas.microsoft.com/office/drawing/2014/main" id="{DB16A936-5780-482B-BBE4-D50D5A72BDBE}"/>
+                <a16:creationId xmlns:a16="http://schemas.microsoft.com/office/drawing/2014/main" id="{A1DE449E-B8F8-4A72-A088-650F3EA6D05A}"/>
               </a:ext>
             </a:extLst>
           </p:cNvPr>
@@ -2808,7 +2808,7 @@
           <p:cNvPr id="9" name="">
             <a:extLst xmlns:a="http://schemas.openxmlformats.org/drawingml/2006/main">
               <a:ext uri="{FF2B5EF4-FFF2-40B4-BE49-F238E27FC236}">
-                <a16:creationId xmlns:a16="http://schemas.microsoft.com/office/drawing/2014/main" id="{91DA743E-B1B9-4A8D-9BE0-58A9F361DC43}"/>
+                <a16:creationId xmlns:a16="http://schemas.microsoft.com/office/drawing/2014/main" id="{0DE72BB9-AB53-42AA-80F1-D98421C22783}"/>
               </a:ext>
             </a:extLst>
           </p:cNvPr>
@@ -2865,7 +2865,7 @@
           <p:cNvPr id="10" name="">
             <a:extLst xmlns:a="http://schemas.openxmlformats.org/drawingml/2006/main">
               <a:ext uri="{FF2B5EF4-FFF2-40B4-BE49-F238E27FC236}">
-                <a16:creationId xmlns:a16="http://schemas.microsoft.com/office/drawing/2014/main" id="{D1AE4F31-8CAF-4DB1-9760-EED502C8C9F4}"/>
+                <a16:creationId xmlns:a16="http://schemas.microsoft.com/office/drawing/2014/main" id="{610DA463-9DB8-4F96-9A6E-5925F47C69E6}"/>
               </a:ext>
             </a:extLst>
           </p:cNvPr>
@@ -2922,7 +2922,7 @@
           <p:cNvPr id="11" name="">
             <a:extLst xmlns:a="http://schemas.openxmlformats.org/drawingml/2006/main">
               <a:ext uri="{FF2B5EF4-FFF2-40B4-BE49-F238E27FC236}">
-                <a16:creationId xmlns:a16="http://schemas.microsoft.com/office/drawing/2014/main" id="{2100644E-F047-4687-BC1F-2AFE10E9EB98}"/>
+                <a16:creationId xmlns:a16="http://schemas.microsoft.com/office/drawing/2014/main" id="{4D1230BC-6B0B-4EA0-8D8E-332D8863CA2D}"/>
               </a:ext>
             </a:extLst>
           </p:cNvPr>
@@ -2979,7 +2979,7 @@
           <p:cNvPr id="12" name="">
             <a:extLst xmlns:a="http://schemas.openxmlformats.org/drawingml/2006/main">
               <a:ext uri="{FF2B5EF4-FFF2-40B4-BE49-F238E27FC236}">
-                <a16:creationId xmlns:a16="http://schemas.microsoft.com/office/drawing/2014/main" id="{E675C626-510E-4057-B1D8-4A758C43FA59}"/>
+                <a16:creationId xmlns:a16="http://schemas.microsoft.com/office/drawing/2014/main" id="{E3D57336-04DE-4204-8DFD-42F5C4C30206}"/>
               </a:ext>
             </a:extLst>
           </p:cNvPr>
@@ -3036,7 +3036,7 @@
           <p:cNvPr id="13" name="">
             <a:extLst xmlns:a="http://schemas.openxmlformats.org/drawingml/2006/main">
               <a:ext uri="{FF2B5EF4-FFF2-40B4-BE49-F238E27FC236}">
-                <a16:creationId xmlns:a16="http://schemas.microsoft.com/office/drawing/2014/main" id="{2B8D12F9-C69E-45FB-9D09-D1588D9FD32B}"/>
+                <a16:creationId xmlns:a16="http://schemas.microsoft.com/office/drawing/2014/main" id="{5058CE6F-E73B-463F-8DBC-86FC663FD1E4}"/>
               </a:ext>
             </a:extLst>
           </p:cNvPr>
@@ -3091,7 +3091,7 @@
     </p:spTree>
     <p:extLst>
       <p:ext uri="{BB962C8B-B14F-4D97-AF65-F5344CB8AC3E}">
-        <p14:creationId xmlns:p14="http://schemas.microsoft.com/office/powerpoint/2010/main" val="606320601"/>
+        <p14:creationId xmlns:p14="http://schemas.microsoft.com/office/powerpoint/2010/main" val="928358631"/>
       </p:ext>
     </p:extLst>
   </p:cSld>
@@ -3292,7 +3292,7 @@
           <p:cNvPr id="19" name="">
             <a:extLst xmlns:a="http://schemas.openxmlformats.org/drawingml/2006/main">
               <a:ext uri="{FF2B5EF4-FFF2-40B4-BE49-F238E27FC236}">
-                <a16:creationId xmlns:a16="http://schemas.microsoft.com/office/drawing/2014/main" id="{A8F83023-ED81-405E-A89E-89567ED16899}"/>
+                <a16:creationId xmlns:a16="http://schemas.microsoft.com/office/drawing/2014/main" id="{6E78CAAA-F07D-413A-80DF-CF5A8C2F5448}"/>
               </a:ext>
             </a:extLst>
           </p:cNvPr>
@@ -3324,7 +3324,7 @@
           <p:cNvPr id="2" name="">
             <a:extLst xmlns:a="http://schemas.openxmlformats.org/drawingml/2006/main">
               <a:ext uri="{FF2B5EF4-FFF2-40B4-BE49-F238E27FC236}">
-                <a16:creationId xmlns:a16="http://schemas.microsoft.com/office/drawing/2014/main" id="{15613AD0-E703-4E21-A409-1A7957CA4193}"/>
+                <a16:creationId xmlns:a16="http://schemas.microsoft.com/office/drawing/2014/main" id="{CCF13564-5BD8-4F1F-B074-CF53DDDB3A38}"/>
               </a:ext>
             </a:extLst>
           </p:cNvPr>
@@ -3381,7 +3381,7 @@
           <p:cNvPr id="3" name="">
             <a:extLst xmlns:a="http://schemas.openxmlformats.org/drawingml/2006/main">
               <a:ext uri="{FF2B5EF4-FFF2-40B4-BE49-F238E27FC236}">
-                <a16:creationId xmlns:a16="http://schemas.microsoft.com/office/drawing/2014/main" id="{E472D337-6F5D-4C8B-A5CF-B16A3A86AD0F}"/>
+                <a16:creationId xmlns:a16="http://schemas.microsoft.com/office/drawing/2014/main" id="{C0E1285B-EE27-44CC-86CD-5F6B6431F306}"/>
               </a:ext>
             </a:extLst>
           </p:cNvPr>
@@ -3413,7 +3413,7 @@
           <p:cNvPr id="4" name="">
             <a:extLst xmlns:a="http://schemas.openxmlformats.org/drawingml/2006/main">
               <a:ext uri="{FF2B5EF4-FFF2-40B4-BE49-F238E27FC236}">
-                <a16:creationId xmlns:a16="http://schemas.microsoft.com/office/drawing/2014/main" id="{56E08B27-D4A7-4FAE-A626-0723DC3761BE}"/>
+                <a16:creationId xmlns:a16="http://schemas.microsoft.com/office/drawing/2014/main" id="{31DC441D-2D40-4282-A968-38AB4413A726}"/>
               </a:ext>
             </a:extLst>
           </p:cNvPr>
@@ -3470,7 +3470,7 @@
           <p:cNvPr id="5" name="">
             <a:extLst xmlns:a="http://schemas.openxmlformats.org/drawingml/2006/main">
               <a:ext uri="{FF2B5EF4-FFF2-40B4-BE49-F238E27FC236}">
-                <a16:creationId xmlns:a16="http://schemas.microsoft.com/office/drawing/2014/main" id="{62EE82F1-48DD-4181-87DF-D85D2F524C2C}"/>
+                <a16:creationId xmlns:a16="http://schemas.microsoft.com/office/drawing/2014/main" id="{623FD4DF-55E4-4850-BD5C-BDB4D6F7B1CF}"/>
               </a:ext>
             </a:extLst>
           </p:cNvPr>
@@ -3527,7 +3527,7 @@
           <p:cNvPr id="6" name="">
             <a:extLst xmlns:a="http://schemas.openxmlformats.org/drawingml/2006/main">
               <a:ext uri="{FF2B5EF4-FFF2-40B4-BE49-F238E27FC236}">
-                <a16:creationId xmlns:a16="http://schemas.microsoft.com/office/drawing/2014/main" id="{3666360D-F5DF-42A6-8D95-DB631D27D8C7}"/>
+                <a16:creationId xmlns:a16="http://schemas.microsoft.com/office/drawing/2014/main" id="{32478DCE-B0B6-475C-B1CB-2F798123D4FF}"/>
               </a:ext>
             </a:extLst>
           </p:cNvPr>
@@ -3584,7 +3584,7 @@
           <p:cNvPr id="7" name="">
             <a:extLst xmlns:a="http://schemas.openxmlformats.org/drawingml/2006/main">
               <a:ext uri="{FF2B5EF4-FFF2-40B4-BE49-F238E27FC236}">
-                <a16:creationId xmlns:a16="http://schemas.microsoft.com/office/drawing/2014/main" id="{386470C3-B0E7-431C-9C14-9CE41A325BEF}"/>
+                <a16:creationId xmlns:a16="http://schemas.microsoft.com/office/drawing/2014/main" id="{A6665E38-BA19-4295-97F0-15A9B3768A39}"/>
               </a:ext>
             </a:extLst>
           </p:cNvPr>
@@ -3616,7 +3616,7 @@
           <p:cNvPr id="8" name="">
             <a:extLst xmlns:a="http://schemas.openxmlformats.org/drawingml/2006/main">
               <a:ext uri="{FF2B5EF4-FFF2-40B4-BE49-F238E27FC236}">
-                <a16:creationId xmlns:a16="http://schemas.microsoft.com/office/drawing/2014/main" id="{81103D63-DF66-461B-8996-638C963C84B9}"/>
+                <a16:creationId xmlns:a16="http://schemas.microsoft.com/office/drawing/2014/main" id="{E26EAE2B-3A3F-49EA-A49C-57D52AEA8B0F}"/>
               </a:ext>
             </a:extLst>
           </p:cNvPr>
@@ -3673,7 +3673,7 @@
           <p:cNvPr id="9" name="">
             <a:extLst xmlns:a="http://schemas.openxmlformats.org/drawingml/2006/main">
               <a:ext uri="{FF2B5EF4-FFF2-40B4-BE49-F238E27FC236}">
-                <a16:creationId xmlns:a16="http://schemas.microsoft.com/office/drawing/2014/main" id="{C790222F-B7B0-49EC-A778-E3F32212676B}"/>
+                <a16:creationId xmlns:a16="http://schemas.microsoft.com/office/drawing/2014/main" id="{F29B1561-7931-4165-B506-EF8F10DE72A3}"/>
               </a:ext>
             </a:extLst>
           </p:cNvPr>
@@ -3730,7 +3730,7 @@
           <p:cNvPr id="10" name="">
             <a:extLst xmlns:a="http://schemas.openxmlformats.org/drawingml/2006/main">
               <a:ext uri="{FF2B5EF4-FFF2-40B4-BE49-F238E27FC236}">
-                <a16:creationId xmlns:a16="http://schemas.microsoft.com/office/drawing/2014/main" id="{0FBF8C1D-1918-4BA4-989A-902860556FB8}"/>
+                <a16:creationId xmlns:a16="http://schemas.microsoft.com/office/drawing/2014/main" id="{DC51A15E-517F-47D4-979F-FCB898A67B85}"/>
               </a:ext>
             </a:extLst>
           </p:cNvPr>
@@ -3787,7 +3787,7 @@
           <p:cNvPr id="11" name="">
             <a:extLst xmlns:a="http://schemas.openxmlformats.org/drawingml/2006/main">
               <a:ext uri="{FF2B5EF4-FFF2-40B4-BE49-F238E27FC236}">
-                <a16:creationId xmlns:a16="http://schemas.microsoft.com/office/drawing/2014/main" id="{F0F0ADEE-E23D-4921-92DF-234FBE383AA6}"/>
+                <a16:creationId xmlns:a16="http://schemas.microsoft.com/office/drawing/2014/main" id="{CE9099F6-AD98-4D2B-ADEF-78439C05FC15}"/>
               </a:ext>
             </a:extLst>
           </p:cNvPr>
@@ -3821,7 +3821,7 @@
           <p:cNvPr id="12" name="">
             <a:extLst xmlns:a="http://schemas.openxmlformats.org/drawingml/2006/main">
               <a:ext uri="{FF2B5EF4-FFF2-40B4-BE49-F238E27FC236}">
-                <a16:creationId xmlns:a16="http://schemas.microsoft.com/office/drawing/2014/main" id="{7BF12E4A-A3CB-4A7A-A8E2-F5FE4C841186}"/>
+                <a16:creationId xmlns:a16="http://schemas.microsoft.com/office/drawing/2014/main" id="{3546A931-DED9-4B37-AD4D-C8E0E4ED3DC9}"/>
               </a:ext>
             </a:extLst>
           </p:cNvPr>
@@ -3878,7 +3878,7 @@
           <p:cNvPr id="13" name="">
             <a:extLst xmlns:a="http://schemas.openxmlformats.org/drawingml/2006/main">
               <a:ext uri="{FF2B5EF4-FFF2-40B4-BE49-F238E27FC236}">
-                <a16:creationId xmlns:a16="http://schemas.microsoft.com/office/drawing/2014/main" id="{4791EFE5-4061-448C-88F2-3B8E04C158E4}"/>
+                <a16:creationId xmlns:a16="http://schemas.microsoft.com/office/drawing/2014/main" id="{5ACE41E2-CACD-4142-97C2-3302777F58D4}"/>
               </a:ext>
             </a:extLst>
           </p:cNvPr>
@@ -3935,7 +3935,7 @@
           <p:cNvPr id="14" name="">
             <a:extLst xmlns:a="http://schemas.openxmlformats.org/drawingml/2006/main">
               <a:ext uri="{FF2B5EF4-FFF2-40B4-BE49-F238E27FC236}">
-                <a16:creationId xmlns:a16="http://schemas.microsoft.com/office/drawing/2014/main" id="{92BA3AD6-44E1-4179-B5B5-66C208EC1FA7}"/>
+                <a16:creationId xmlns:a16="http://schemas.microsoft.com/office/drawing/2014/main" id="{5FD8BF07-A532-4211-A0E9-BBE51E254B98}"/>
               </a:ext>
             </a:extLst>
           </p:cNvPr>
@@ -3992,7 +3992,7 @@
           <p:cNvPr id="15" name="">
             <a:extLst xmlns:a="http://schemas.openxmlformats.org/drawingml/2006/main">
               <a:ext uri="{FF2B5EF4-FFF2-40B4-BE49-F238E27FC236}">
-                <a16:creationId xmlns:a16="http://schemas.microsoft.com/office/drawing/2014/main" id="{F832A521-6884-49E4-A429-BB7F898CF459}"/>
+                <a16:creationId xmlns:a16="http://schemas.microsoft.com/office/drawing/2014/main" id="{FB5EAA27-5A2B-4B7F-848E-634BEB96EB68}"/>
               </a:ext>
             </a:extLst>
           </p:cNvPr>
@@ -4026,7 +4026,7 @@
           <p:cNvPr id="16" name="">
             <a:extLst xmlns:a="http://schemas.openxmlformats.org/drawingml/2006/main">
               <a:ext uri="{FF2B5EF4-FFF2-40B4-BE49-F238E27FC236}">
-                <a16:creationId xmlns:a16="http://schemas.microsoft.com/office/drawing/2014/main" id="{F3F1E574-A9FF-4E38-BBCD-87FD66BE6E41}"/>
+                <a16:creationId xmlns:a16="http://schemas.microsoft.com/office/drawing/2014/main" id="{EC49B89C-750A-4266-B468-8F3E4C7540B3}"/>
               </a:ext>
             </a:extLst>
           </p:cNvPr>
@@ -4083,7 +4083,7 @@
           <p:cNvPr id="17" name="">
             <a:extLst xmlns:a="http://schemas.openxmlformats.org/drawingml/2006/main">
               <a:ext uri="{FF2B5EF4-FFF2-40B4-BE49-F238E27FC236}">
-                <a16:creationId xmlns:a16="http://schemas.microsoft.com/office/drawing/2014/main" id="{86C165C6-226A-42E3-8DC8-A39181142B2E}"/>
+                <a16:creationId xmlns:a16="http://schemas.microsoft.com/office/drawing/2014/main" id="{58809361-4427-45EB-8171-8275DC6830F7}"/>
               </a:ext>
             </a:extLst>
           </p:cNvPr>
@@ -4140,7 +4140,7 @@
           <p:cNvPr id="18" name="">
             <a:extLst xmlns:a="http://schemas.openxmlformats.org/drawingml/2006/main">
               <a:ext uri="{FF2B5EF4-FFF2-40B4-BE49-F238E27FC236}">
-                <a16:creationId xmlns:a16="http://schemas.microsoft.com/office/drawing/2014/main" id="{6CD5E303-959A-4A00-AC06-82A1D633F29B}"/>
+                <a16:creationId xmlns:a16="http://schemas.microsoft.com/office/drawing/2014/main" id="{B4191086-B539-4C09-B16E-04E06C9DF002}"/>
               </a:ext>
             </a:extLst>
           </p:cNvPr>
@@ -4195,7 +4195,7 @@
     </p:spTree>
     <p:extLst>
       <p:ext uri="{BB962C8B-B14F-4D97-AF65-F5344CB8AC3E}">
-        <p14:creationId xmlns:p14="http://schemas.microsoft.com/office/powerpoint/2010/main" val="1730172101"/>
+        <p14:creationId xmlns:p14="http://schemas.microsoft.com/office/powerpoint/2010/main" val="1366424985"/>
       </p:ext>
     </p:extLst>
   </p:cSld>
@@ -4350,7 +4350,7 @@
           <p:cNvPr id="23" name="">
             <a:extLst xmlns:a="http://schemas.openxmlformats.org/drawingml/2006/main">
               <a:ext uri="{FF2B5EF4-FFF2-40B4-BE49-F238E27FC236}">
-                <a16:creationId xmlns:a16="http://schemas.microsoft.com/office/drawing/2014/main" id="{B6951B39-42FF-427E-ACFA-EA93EC32E028}"/>
+                <a16:creationId xmlns:a16="http://schemas.microsoft.com/office/drawing/2014/main" id="{1721126D-4E4C-4FBB-9B39-768F0EB04CCE}"/>
               </a:ext>
             </a:extLst>
           </p:cNvPr>
@@ -4382,7 +4382,7 @@
           <p:cNvPr id="2" name="">
             <a:extLst xmlns:a="http://schemas.openxmlformats.org/drawingml/2006/main">
               <a:ext uri="{FF2B5EF4-FFF2-40B4-BE49-F238E27FC236}">
-                <a16:creationId xmlns:a16="http://schemas.microsoft.com/office/drawing/2014/main" id="{0F99E0D9-E58A-4A95-AD0F-A4228A90F52F}"/>
+                <a16:creationId xmlns:a16="http://schemas.microsoft.com/office/drawing/2014/main" id="{70F4C7F5-E5F3-4B27-9C64-7F56B3D61829}"/>
               </a:ext>
             </a:extLst>
           </p:cNvPr>
@@ -4439,7 +4439,7 @@
           <p:cNvPr id="3" name="">
             <a:extLst xmlns:a="http://schemas.openxmlformats.org/drawingml/2006/main">
               <a:ext uri="{FF2B5EF4-FFF2-40B4-BE49-F238E27FC236}">
-                <a16:creationId xmlns:a16="http://schemas.microsoft.com/office/drawing/2014/main" id="{A93DE45D-A6E9-4176-96CB-878472FC263F}"/>
+                <a16:creationId xmlns:a16="http://schemas.microsoft.com/office/drawing/2014/main" id="{AC564C5F-FEE3-4C66-92BD-5E4DF9D63341}"/>
               </a:ext>
             </a:extLst>
           </p:cNvPr>
@@ -4471,7 +4471,7 @@
           <p:cNvPr id="4" name="">
             <a:extLst xmlns:a="http://schemas.openxmlformats.org/drawingml/2006/main">
               <a:ext uri="{FF2B5EF4-FFF2-40B4-BE49-F238E27FC236}">
-                <a16:creationId xmlns:a16="http://schemas.microsoft.com/office/drawing/2014/main" id="{E0288F9B-3595-4485-97A0-05229F4388C7}"/>
+                <a16:creationId xmlns:a16="http://schemas.microsoft.com/office/drawing/2014/main" id="{6702AAB0-2D2A-42AE-8AB3-4DE360879993}"/>
               </a:ext>
             </a:extLst>
           </p:cNvPr>
@@ -4528,7 +4528,7 @@
           <p:cNvPr id="5" name="">
             <a:extLst xmlns:a="http://schemas.openxmlformats.org/drawingml/2006/main">
               <a:ext uri="{FF2B5EF4-FFF2-40B4-BE49-F238E27FC236}">
-                <a16:creationId xmlns:a16="http://schemas.microsoft.com/office/drawing/2014/main" id="{2D6053D4-5F82-4A7E-B276-A434AEF94D93}"/>
+                <a16:creationId xmlns:a16="http://schemas.microsoft.com/office/drawing/2014/main" id="{5649B2B8-8686-4EC0-A349-65D0A47CE529}"/>
               </a:ext>
             </a:extLst>
           </p:cNvPr>
@@ -4585,7 +4585,7 @@
           <p:cNvPr id="6" name="">
             <a:extLst xmlns:a="http://schemas.openxmlformats.org/drawingml/2006/main">
               <a:ext uri="{FF2B5EF4-FFF2-40B4-BE49-F238E27FC236}">
-                <a16:creationId xmlns:a16="http://schemas.microsoft.com/office/drawing/2014/main" id="{E3FDC962-DF82-42CD-9E8F-1011524B68EA}"/>
+                <a16:creationId xmlns:a16="http://schemas.microsoft.com/office/drawing/2014/main" id="{37C5AE10-DFC6-484F-A4B0-C9541871EA62}"/>
               </a:ext>
             </a:extLst>
           </p:cNvPr>
@@ -4642,7 +4642,7 @@
           <p:cNvPr id="7" name="">
             <a:extLst xmlns:a="http://schemas.openxmlformats.org/drawingml/2006/main">
               <a:ext uri="{FF2B5EF4-FFF2-40B4-BE49-F238E27FC236}">
-                <a16:creationId xmlns:a16="http://schemas.microsoft.com/office/drawing/2014/main" id="{ADB5190B-1452-4786-92EE-42BF2946B2AE}"/>
+                <a16:creationId xmlns:a16="http://schemas.microsoft.com/office/drawing/2014/main" id="{BF34DEFA-5F8E-4F39-8607-4E763B34EC92}"/>
               </a:ext>
             </a:extLst>
           </p:cNvPr>
@@ -4674,7 +4674,7 @@
           <p:cNvPr id="8" name="">
             <a:extLst xmlns:a="http://schemas.openxmlformats.org/drawingml/2006/main">
               <a:ext uri="{FF2B5EF4-FFF2-40B4-BE49-F238E27FC236}">
-                <a16:creationId xmlns:a16="http://schemas.microsoft.com/office/drawing/2014/main" id="{3641C6CD-8F11-4718-9881-4FA618371B58}"/>
+                <a16:creationId xmlns:a16="http://schemas.microsoft.com/office/drawing/2014/main" id="{CFA771DA-9E6D-450B-B409-3A2B47C341D6}"/>
               </a:ext>
             </a:extLst>
           </p:cNvPr>
@@ -4731,7 +4731,7 @@
           <p:cNvPr id="9" name="">
             <a:extLst xmlns:a="http://schemas.openxmlformats.org/drawingml/2006/main">
               <a:ext uri="{FF2B5EF4-FFF2-40B4-BE49-F238E27FC236}">
-                <a16:creationId xmlns:a16="http://schemas.microsoft.com/office/drawing/2014/main" id="{ADF21837-2539-4B09-8CF1-79DD1AB0E093}"/>
+                <a16:creationId xmlns:a16="http://schemas.microsoft.com/office/drawing/2014/main" id="{74A9B5A3-A8C3-461C-BD02-FE8B27968C0D}"/>
               </a:ext>
             </a:extLst>
           </p:cNvPr>
@@ -4788,7 +4788,7 @@
           <p:cNvPr id="10" name="">
             <a:extLst xmlns:a="http://schemas.openxmlformats.org/drawingml/2006/main">
               <a:ext uri="{FF2B5EF4-FFF2-40B4-BE49-F238E27FC236}">
-                <a16:creationId xmlns:a16="http://schemas.microsoft.com/office/drawing/2014/main" id="{F68E15CB-CE9C-4A11-B98A-605F198757F3}"/>
+                <a16:creationId xmlns:a16="http://schemas.microsoft.com/office/drawing/2014/main" id="{ABA545B9-8C8D-4B0B-9787-C55E296B50B6}"/>
               </a:ext>
             </a:extLst>
           </p:cNvPr>
@@ -4822,7 +4822,7 @@
           <p:cNvPr id="11" name="">
             <a:extLst xmlns:a="http://schemas.openxmlformats.org/drawingml/2006/main">
               <a:ext uri="{FF2B5EF4-FFF2-40B4-BE49-F238E27FC236}">
-                <a16:creationId xmlns:a16="http://schemas.microsoft.com/office/drawing/2014/main" id="{5B296713-C0E8-42B9-98E1-801375AE8249}"/>
+                <a16:creationId xmlns:a16="http://schemas.microsoft.com/office/drawing/2014/main" id="{A1C8179F-C3CC-4D4D-A601-48FC4BE577E9}"/>
               </a:ext>
             </a:extLst>
           </p:cNvPr>
@@ -4854,7 +4854,7 @@
           <p:cNvPr id="12" name="">
             <a:extLst xmlns:a="http://schemas.openxmlformats.org/drawingml/2006/main">
               <a:ext uri="{FF2B5EF4-FFF2-40B4-BE49-F238E27FC236}">
-                <a16:creationId xmlns:a16="http://schemas.microsoft.com/office/drawing/2014/main" id="{2DCE7DE2-C7BA-4FC8-BC78-E8C39241CFF2}"/>
+                <a16:creationId xmlns:a16="http://schemas.microsoft.com/office/drawing/2014/main" id="{855C149B-872D-44E9-BDC9-0A5E45C05BB9}"/>
               </a:ext>
             </a:extLst>
           </p:cNvPr>
@@ -4911,7 +4911,7 @@
           <p:cNvPr id="13" name="">
             <a:extLst xmlns:a="http://schemas.openxmlformats.org/drawingml/2006/main">
               <a:ext uri="{FF2B5EF4-FFF2-40B4-BE49-F238E27FC236}">
-                <a16:creationId xmlns:a16="http://schemas.microsoft.com/office/drawing/2014/main" id="{063E2F2B-AC82-4BBB-BDC9-C1148EA16E15}"/>
+                <a16:creationId xmlns:a16="http://schemas.microsoft.com/office/drawing/2014/main" id="{9D356641-F035-4AEA-8FC1-E2324DFB455B}"/>
               </a:ext>
             </a:extLst>
           </p:cNvPr>
@@ -4968,7 +4968,7 @@
           <p:cNvPr id="14" name="">
             <a:extLst xmlns:a="http://schemas.openxmlformats.org/drawingml/2006/main">
               <a:ext uri="{FF2B5EF4-FFF2-40B4-BE49-F238E27FC236}">
-                <a16:creationId xmlns:a16="http://schemas.microsoft.com/office/drawing/2014/main" id="{A9AA48C2-74F9-4BF5-948E-21C377D5AAAB}"/>
+                <a16:creationId xmlns:a16="http://schemas.microsoft.com/office/drawing/2014/main" id="{BD43996B-C002-47EC-A0BC-A630255D3A24}"/>
               </a:ext>
             </a:extLst>
           </p:cNvPr>
@@ -5002,7 +5002,7 @@
           <p:cNvPr id="15" name="">
             <a:extLst xmlns:a="http://schemas.openxmlformats.org/drawingml/2006/main">
               <a:ext uri="{FF2B5EF4-FFF2-40B4-BE49-F238E27FC236}">
-                <a16:creationId xmlns:a16="http://schemas.microsoft.com/office/drawing/2014/main" id="{CD6B40C2-2C94-4175-BE42-5DBC0C8013A2}"/>
+                <a16:creationId xmlns:a16="http://schemas.microsoft.com/office/drawing/2014/main" id="{BBA261F2-1F86-4A97-8951-91DFBAFB54AC}"/>
               </a:ext>
             </a:extLst>
           </p:cNvPr>
@@ -5034,7 +5034,7 @@
           <p:cNvPr id="16" name="">
             <a:extLst xmlns:a="http://schemas.openxmlformats.org/drawingml/2006/main">
               <a:ext uri="{FF2B5EF4-FFF2-40B4-BE49-F238E27FC236}">
-                <a16:creationId xmlns:a16="http://schemas.microsoft.com/office/drawing/2014/main" id="{19664748-5479-413B-ACF1-194A32C16FCD}"/>
+                <a16:creationId xmlns:a16="http://schemas.microsoft.com/office/drawing/2014/main" id="{1C3CFF8E-AEEA-40FD-A96A-4EF27703BF4D}"/>
               </a:ext>
             </a:extLst>
           </p:cNvPr>
@@ -5091,7 +5091,7 @@
           <p:cNvPr id="17" name="">
             <a:extLst xmlns:a="http://schemas.openxmlformats.org/drawingml/2006/main">
               <a:ext uri="{FF2B5EF4-FFF2-40B4-BE49-F238E27FC236}">
-                <a16:creationId xmlns:a16="http://schemas.microsoft.com/office/drawing/2014/main" id="{40DA91A8-DC93-4216-9C98-332ED6348845}"/>
+                <a16:creationId xmlns:a16="http://schemas.microsoft.com/office/drawing/2014/main" id="{597169E7-B439-42A1-A675-D126BB06AEB3}"/>
               </a:ext>
             </a:extLst>
           </p:cNvPr>
@@ -5148,7 +5148,7 @@
           <p:cNvPr id="18" name="">
             <a:extLst xmlns:a="http://schemas.openxmlformats.org/drawingml/2006/main">
               <a:ext uri="{FF2B5EF4-FFF2-40B4-BE49-F238E27FC236}">
-                <a16:creationId xmlns:a16="http://schemas.microsoft.com/office/drawing/2014/main" id="{37601A3C-EADE-4056-B727-D6829DA3757C}"/>
+                <a16:creationId xmlns:a16="http://schemas.microsoft.com/office/drawing/2014/main" id="{6EAC0D5D-9E04-4452-BEDA-C735423C7026}"/>
               </a:ext>
             </a:extLst>
           </p:cNvPr>
@@ -5182,7 +5182,7 @@
           <p:cNvPr id="19" name="">
             <a:extLst xmlns:a="http://schemas.openxmlformats.org/drawingml/2006/main">
               <a:ext uri="{FF2B5EF4-FFF2-40B4-BE49-F238E27FC236}">
-                <a16:creationId xmlns:a16="http://schemas.microsoft.com/office/drawing/2014/main" id="{5DE7F00C-8860-4C8F-A434-4A74D111CE0C}"/>
+                <a16:creationId xmlns:a16="http://schemas.microsoft.com/office/drawing/2014/main" id="{9EABB813-5038-47E5-AFF6-314B5651C204}"/>
               </a:ext>
             </a:extLst>
           </p:cNvPr>
@@ -5214,7 +5214,7 @@
           <p:cNvPr id="20" name="">
             <a:extLst xmlns:a="http://schemas.openxmlformats.org/drawingml/2006/main">
               <a:ext uri="{FF2B5EF4-FFF2-40B4-BE49-F238E27FC236}">
-                <a16:creationId xmlns:a16="http://schemas.microsoft.com/office/drawing/2014/main" id="{10DF8B73-552A-46F8-9534-7453D5DDBEEF}"/>
+                <a16:creationId xmlns:a16="http://schemas.microsoft.com/office/drawing/2014/main" id="{014C5CCC-D943-4501-8D4D-6AD787037E43}"/>
               </a:ext>
             </a:extLst>
           </p:cNvPr>
@@ -5271,7 +5271,7 @@
           <p:cNvPr id="21" name="">
             <a:extLst xmlns:a="http://schemas.openxmlformats.org/drawingml/2006/main">
               <a:ext uri="{FF2B5EF4-FFF2-40B4-BE49-F238E27FC236}">
-                <a16:creationId xmlns:a16="http://schemas.microsoft.com/office/drawing/2014/main" id="{40AEFE6D-3A2B-40A6-AAFD-89AD40FE4C2E}"/>
+                <a16:creationId xmlns:a16="http://schemas.microsoft.com/office/drawing/2014/main" id="{4E5EA395-2565-4548-AA21-9E58055EC29D}"/>
               </a:ext>
             </a:extLst>
           </p:cNvPr>
@@ -5328,7 +5328,7 @@
           <p:cNvPr id="22" name="">
             <a:extLst xmlns:a="http://schemas.openxmlformats.org/drawingml/2006/main">
               <a:ext uri="{FF2B5EF4-FFF2-40B4-BE49-F238E27FC236}">
-                <a16:creationId xmlns:a16="http://schemas.microsoft.com/office/drawing/2014/main" id="{6E256F23-2AB3-4CE2-8932-90DA0DA11EC1}"/>
+                <a16:creationId xmlns:a16="http://schemas.microsoft.com/office/drawing/2014/main" id="{CE678A11-5B83-4969-ABC6-62EED92666AB}"/>
               </a:ext>
             </a:extLst>
           </p:cNvPr>
@@ -5383,7 +5383,7 @@
     </p:spTree>
     <p:extLst>
       <p:ext uri="{BB962C8B-B14F-4D97-AF65-F5344CB8AC3E}">
-        <p14:creationId xmlns:p14="http://schemas.microsoft.com/office/powerpoint/2010/main" val="1171102733"/>
+        <p14:creationId xmlns:p14="http://schemas.microsoft.com/office/powerpoint/2010/main" val="2084776499"/>
       </p:ext>
     </p:extLst>
   </p:cSld>
@@ -5584,7 +5584,7 @@
           <p:cNvPr id="23" name="">
             <a:extLst xmlns:a="http://schemas.openxmlformats.org/drawingml/2006/main">
               <a:ext uri="{FF2B5EF4-FFF2-40B4-BE49-F238E27FC236}">
-                <a16:creationId xmlns:a16="http://schemas.microsoft.com/office/drawing/2014/main" id="{59C46B4A-1E11-43F6-A63D-91885A7FAD18}"/>
+                <a16:creationId xmlns:a16="http://schemas.microsoft.com/office/drawing/2014/main" id="{7F8F2B09-90F0-4A52-AC42-3F93C50F2571}"/>
               </a:ext>
             </a:extLst>
           </p:cNvPr>
@@ -5616,7 +5616,7 @@
           <p:cNvPr id="2" name="">
             <a:extLst xmlns:a="http://schemas.openxmlformats.org/drawingml/2006/main">
               <a:ext uri="{FF2B5EF4-FFF2-40B4-BE49-F238E27FC236}">
-                <a16:creationId xmlns:a16="http://schemas.microsoft.com/office/drawing/2014/main" id="{B481FF8A-E421-4D2D-B9E4-3B4B98B367BD}"/>
+                <a16:creationId xmlns:a16="http://schemas.microsoft.com/office/drawing/2014/main" id="{5748FFFD-1B6D-42BD-8E70-2748161BE4B7}"/>
               </a:ext>
             </a:extLst>
           </p:cNvPr>
@@ -5673,7 +5673,7 @@
           <p:cNvPr id="3" name="">
             <a:extLst xmlns:a="http://schemas.openxmlformats.org/drawingml/2006/main">
               <a:ext uri="{FF2B5EF4-FFF2-40B4-BE49-F238E27FC236}">
-                <a16:creationId xmlns:a16="http://schemas.microsoft.com/office/drawing/2014/main" id="{353BF860-C0C1-458C-854D-3D14458A7DFB}"/>
+                <a16:creationId xmlns:a16="http://schemas.microsoft.com/office/drawing/2014/main" id="{EB5CF209-9965-4074-A0C2-3E16EE79379C}"/>
               </a:ext>
             </a:extLst>
           </p:cNvPr>
@@ -5705,7 +5705,7 @@
           <p:cNvPr id="4" name="">
             <a:extLst xmlns:a="http://schemas.openxmlformats.org/drawingml/2006/main">
               <a:ext uri="{FF2B5EF4-FFF2-40B4-BE49-F238E27FC236}">
-                <a16:creationId xmlns:a16="http://schemas.microsoft.com/office/drawing/2014/main" id="{6A90DFCB-8672-4D23-946A-D5274D06E825}"/>
+                <a16:creationId xmlns:a16="http://schemas.microsoft.com/office/drawing/2014/main" id="{4F156F0A-F7E9-43C8-B6CE-86DC777670B6}"/>
               </a:ext>
             </a:extLst>
           </p:cNvPr>
@@ -5762,7 +5762,7 @@
           <p:cNvPr id="5" name="">
             <a:extLst xmlns:a="http://schemas.openxmlformats.org/drawingml/2006/main">
               <a:ext uri="{FF2B5EF4-FFF2-40B4-BE49-F238E27FC236}">
-                <a16:creationId xmlns:a16="http://schemas.microsoft.com/office/drawing/2014/main" id="{9FC640B0-263D-4CE8-874D-EB56600203D5}"/>
+                <a16:creationId xmlns:a16="http://schemas.microsoft.com/office/drawing/2014/main" id="{F211056B-B536-4901-904E-30ACFB952F58}"/>
               </a:ext>
             </a:extLst>
           </p:cNvPr>
@@ -5819,7 +5819,7 @@
           <p:cNvPr id="6" name="">
             <a:extLst xmlns:a="http://schemas.openxmlformats.org/drawingml/2006/main">
               <a:ext uri="{FF2B5EF4-FFF2-40B4-BE49-F238E27FC236}">
-                <a16:creationId xmlns:a16="http://schemas.microsoft.com/office/drawing/2014/main" id="{F42175DE-E08E-4C32-BD4B-2E84D89976C1}"/>
+                <a16:creationId xmlns:a16="http://schemas.microsoft.com/office/drawing/2014/main" id="{8927DA73-D2DC-46B0-A686-7475DC64D90A}"/>
               </a:ext>
             </a:extLst>
           </p:cNvPr>
@@ -5876,7 +5876,7 @@
           <p:cNvPr id="7" name="">
             <a:extLst xmlns:a="http://schemas.openxmlformats.org/drawingml/2006/main">
               <a:ext uri="{FF2B5EF4-FFF2-40B4-BE49-F238E27FC236}">
-                <a16:creationId xmlns:a16="http://schemas.microsoft.com/office/drawing/2014/main" id="{EEC605CF-DBEA-4922-AFD3-7C578379167C}"/>
+                <a16:creationId xmlns:a16="http://schemas.microsoft.com/office/drawing/2014/main" id="{F3A15187-D7F0-4C4E-9587-E4B0A9F6D950}"/>
               </a:ext>
             </a:extLst>
           </p:cNvPr>
@@ -5908,7 +5908,7 @@
           <p:cNvPr id="8" name="">
             <a:extLst xmlns:a="http://schemas.openxmlformats.org/drawingml/2006/main">
               <a:ext uri="{FF2B5EF4-FFF2-40B4-BE49-F238E27FC236}">
-                <a16:creationId xmlns:a16="http://schemas.microsoft.com/office/drawing/2014/main" id="{0A5A8638-C2F3-4732-B03F-4861BE70019B}"/>
+                <a16:creationId xmlns:a16="http://schemas.microsoft.com/office/drawing/2014/main" id="{6576CCD0-67B0-4D18-9CFE-529F5F52B5B7}"/>
               </a:ext>
             </a:extLst>
           </p:cNvPr>
@@ -5965,7 +5965,7 @@
           <p:cNvPr id="9" name="">
             <a:extLst xmlns:a="http://schemas.openxmlformats.org/drawingml/2006/main">
               <a:ext uri="{FF2B5EF4-FFF2-40B4-BE49-F238E27FC236}">
-                <a16:creationId xmlns:a16="http://schemas.microsoft.com/office/drawing/2014/main" id="{C877CC3A-F5B4-463D-BFE8-7CBCBC8FA3CC}"/>
+                <a16:creationId xmlns:a16="http://schemas.microsoft.com/office/drawing/2014/main" id="{D8BDE8A8-1AF0-4315-89B3-7556D8DC5EAB}"/>
               </a:ext>
             </a:extLst>
           </p:cNvPr>
@@ -6022,7 +6022,7 @@
           <p:cNvPr id="10" name="">
             <a:extLst xmlns:a="http://schemas.openxmlformats.org/drawingml/2006/main">
               <a:ext uri="{FF2B5EF4-FFF2-40B4-BE49-F238E27FC236}">
-                <a16:creationId xmlns:a16="http://schemas.microsoft.com/office/drawing/2014/main" id="{898CF1FA-007D-4AF4-9E66-31801271EAD0}"/>
+                <a16:creationId xmlns:a16="http://schemas.microsoft.com/office/drawing/2014/main" id="{68881CCD-9E9A-44A3-BEF2-15BB13FE76AC}"/>
               </a:ext>
             </a:extLst>
           </p:cNvPr>
@@ -6056,7 +6056,7 @@
           <p:cNvPr id="11" name="">
             <a:extLst xmlns:a="http://schemas.openxmlformats.org/drawingml/2006/main">
               <a:ext uri="{FF2B5EF4-FFF2-40B4-BE49-F238E27FC236}">
-                <a16:creationId xmlns:a16="http://schemas.microsoft.com/office/drawing/2014/main" id="{DBA299EA-C94E-4E77-B87E-AADDE8090E4D}"/>
+                <a16:creationId xmlns:a16="http://schemas.microsoft.com/office/drawing/2014/main" id="{42FCDD30-E986-4847-BEFA-C1DDB12C88DC}"/>
               </a:ext>
             </a:extLst>
           </p:cNvPr>
@@ -6088,7 +6088,7 @@
           <p:cNvPr id="12" name="">
             <a:extLst xmlns:a="http://schemas.openxmlformats.org/drawingml/2006/main">
               <a:ext uri="{FF2B5EF4-FFF2-40B4-BE49-F238E27FC236}">
-                <a16:creationId xmlns:a16="http://schemas.microsoft.com/office/drawing/2014/main" id="{3C0E2581-E798-4420-92AE-7AC3F55AE073}"/>
+                <a16:creationId xmlns:a16="http://schemas.microsoft.com/office/drawing/2014/main" id="{2132A398-173B-4348-94FC-2AF0FF93EE83}"/>
               </a:ext>
             </a:extLst>
           </p:cNvPr>
@@ -6145,7 +6145,7 @@
           <p:cNvPr id="13" name="">
             <a:extLst xmlns:a="http://schemas.openxmlformats.org/drawingml/2006/main">
               <a:ext uri="{FF2B5EF4-FFF2-40B4-BE49-F238E27FC236}">
-                <a16:creationId xmlns:a16="http://schemas.microsoft.com/office/drawing/2014/main" id="{0570A732-6086-4FBD-9DF8-B250984D1A4F}"/>
+                <a16:creationId xmlns:a16="http://schemas.microsoft.com/office/drawing/2014/main" id="{8BAB85E2-46CC-4769-BCF3-B4F486B2DC5C}"/>
               </a:ext>
             </a:extLst>
           </p:cNvPr>
@@ -6202,7 +6202,7 @@
           <p:cNvPr id="14" name="">
             <a:extLst xmlns:a="http://schemas.openxmlformats.org/drawingml/2006/main">
               <a:ext uri="{FF2B5EF4-FFF2-40B4-BE49-F238E27FC236}">
-                <a16:creationId xmlns:a16="http://schemas.microsoft.com/office/drawing/2014/main" id="{9EE45400-3061-4208-9F47-D2CB5DF0A9B3}"/>
+                <a16:creationId xmlns:a16="http://schemas.microsoft.com/office/drawing/2014/main" id="{9F06EF89-6F15-4E08-99CE-C480CF40769B}"/>
               </a:ext>
             </a:extLst>
           </p:cNvPr>
@@ -6236,7 +6236,7 @@
           <p:cNvPr id="15" name="">
             <a:extLst xmlns:a="http://schemas.openxmlformats.org/drawingml/2006/main">
               <a:ext uri="{FF2B5EF4-FFF2-40B4-BE49-F238E27FC236}">
-                <a16:creationId xmlns:a16="http://schemas.microsoft.com/office/drawing/2014/main" id="{FC20C2E7-0C9D-41CA-87B5-AAB84578E285}"/>
+                <a16:creationId xmlns:a16="http://schemas.microsoft.com/office/drawing/2014/main" id="{0022BA0D-B58C-423E-A4C3-900A5D1A9F1B}"/>
               </a:ext>
             </a:extLst>
           </p:cNvPr>
@@ -6268,7 +6268,7 @@
           <p:cNvPr id="16" name="">
             <a:extLst xmlns:a="http://schemas.openxmlformats.org/drawingml/2006/main">
               <a:ext uri="{FF2B5EF4-FFF2-40B4-BE49-F238E27FC236}">
-                <a16:creationId xmlns:a16="http://schemas.microsoft.com/office/drawing/2014/main" id="{40EDA826-F6AF-4A07-AFE0-182C5C888FBA}"/>
+                <a16:creationId xmlns:a16="http://schemas.microsoft.com/office/drawing/2014/main" id="{49C3E0B2-A53D-4B43-A9AD-A0873AADADA4}"/>
               </a:ext>
             </a:extLst>
           </p:cNvPr>
@@ -6325,7 +6325,7 @@
           <p:cNvPr id="17" name="">
             <a:extLst xmlns:a="http://schemas.openxmlformats.org/drawingml/2006/main">
               <a:ext uri="{FF2B5EF4-FFF2-40B4-BE49-F238E27FC236}">
-                <a16:creationId xmlns:a16="http://schemas.microsoft.com/office/drawing/2014/main" id="{D292EDB6-137D-4172-8E75-7029D1127B0B}"/>
+                <a16:creationId xmlns:a16="http://schemas.microsoft.com/office/drawing/2014/main" id="{C9142B79-5E39-4F67-8753-9246635FD766}"/>
               </a:ext>
             </a:extLst>
           </p:cNvPr>
@@ -6382,7 +6382,7 @@
           <p:cNvPr id="18" name="">
             <a:extLst xmlns:a="http://schemas.openxmlformats.org/drawingml/2006/main">
               <a:ext uri="{FF2B5EF4-FFF2-40B4-BE49-F238E27FC236}">
-                <a16:creationId xmlns:a16="http://schemas.microsoft.com/office/drawing/2014/main" id="{C109AAA2-766A-48DF-81B5-9D2797A316C6}"/>
+                <a16:creationId xmlns:a16="http://schemas.microsoft.com/office/drawing/2014/main" id="{A018A619-6D1F-40EC-9482-15D1425D797F}"/>
               </a:ext>
             </a:extLst>
           </p:cNvPr>
@@ -6416,7 +6416,7 @@
           <p:cNvPr id="19" name="">
             <a:extLst xmlns:a="http://schemas.openxmlformats.org/drawingml/2006/main">
               <a:ext uri="{FF2B5EF4-FFF2-40B4-BE49-F238E27FC236}">
-                <a16:creationId xmlns:a16="http://schemas.microsoft.com/office/drawing/2014/main" id="{77F9BFD3-F2A3-4317-82DB-A2D5B9F5704E}"/>
+                <a16:creationId xmlns:a16="http://schemas.microsoft.com/office/drawing/2014/main" id="{CF24B586-C311-40AF-B816-236EEFC800F2}"/>
               </a:ext>
             </a:extLst>
           </p:cNvPr>
@@ -6448,7 +6448,7 @@
           <p:cNvPr id="20" name="">
             <a:extLst xmlns:a="http://schemas.openxmlformats.org/drawingml/2006/main">
               <a:ext uri="{FF2B5EF4-FFF2-40B4-BE49-F238E27FC236}">
-                <a16:creationId xmlns:a16="http://schemas.microsoft.com/office/drawing/2014/main" id="{366973E3-4060-4861-9A30-FA45EEA6B5C8}"/>
+                <a16:creationId xmlns:a16="http://schemas.microsoft.com/office/drawing/2014/main" id="{80983424-62D0-4BD4-9029-D393DDD52C88}"/>
               </a:ext>
             </a:extLst>
           </p:cNvPr>
@@ -6505,7 +6505,7 @@
           <p:cNvPr id="21" name="">
             <a:extLst xmlns:a="http://schemas.openxmlformats.org/drawingml/2006/main">
               <a:ext uri="{FF2B5EF4-FFF2-40B4-BE49-F238E27FC236}">
-                <a16:creationId xmlns:a16="http://schemas.microsoft.com/office/drawing/2014/main" id="{A5B57BD6-6D2B-401F-902A-200C831BC52A}"/>
+                <a16:creationId xmlns:a16="http://schemas.microsoft.com/office/drawing/2014/main" id="{37D31C98-61D3-4EBB-8A3C-44C12C91820A}"/>
               </a:ext>
             </a:extLst>
           </p:cNvPr>
@@ -6562,7 +6562,7 @@
           <p:cNvPr id="22" name="">
             <a:extLst xmlns:a="http://schemas.openxmlformats.org/drawingml/2006/main">
               <a:ext uri="{FF2B5EF4-FFF2-40B4-BE49-F238E27FC236}">
-                <a16:creationId xmlns:a16="http://schemas.microsoft.com/office/drawing/2014/main" id="{3D814658-9EE8-4CEA-8B84-1C0D0BD56AEB}"/>
+                <a16:creationId xmlns:a16="http://schemas.microsoft.com/office/drawing/2014/main" id="{26F7B18C-F49B-491E-9BAD-04C158172333}"/>
               </a:ext>
             </a:extLst>
           </p:cNvPr>
@@ -6617,7 +6617,7 @@
     </p:spTree>
     <p:extLst>
       <p:ext uri="{BB962C8B-B14F-4D97-AF65-F5344CB8AC3E}">
-        <p14:creationId xmlns:p14="http://schemas.microsoft.com/office/powerpoint/2010/main" val="364315138"/>
+        <p14:creationId xmlns:p14="http://schemas.microsoft.com/office/powerpoint/2010/main" val="1177105916"/>
       </p:ext>
     </p:extLst>
   </p:cSld>
@@ -6818,7 +6818,7 @@
           <p:cNvPr id="16" name="">
             <a:extLst xmlns:a="http://schemas.openxmlformats.org/drawingml/2006/main">
               <a:ext uri="{FF2B5EF4-FFF2-40B4-BE49-F238E27FC236}">
-                <a16:creationId xmlns:a16="http://schemas.microsoft.com/office/drawing/2014/main" id="{D159F6AE-2E02-45BE-9230-80EFCB527267}"/>
+                <a16:creationId xmlns:a16="http://schemas.microsoft.com/office/drawing/2014/main" id="{E56ED704-4FCA-45F8-82C7-D1FC88D897C1}"/>
               </a:ext>
             </a:extLst>
           </p:cNvPr>
@@ -6850,7 +6850,7 @@
           <p:cNvPr id="2" name="">
             <a:extLst xmlns:a="http://schemas.openxmlformats.org/drawingml/2006/main">
               <a:ext uri="{FF2B5EF4-FFF2-40B4-BE49-F238E27FC236}">
-                <a16:creationId xmlns:a16="http://schemas.microsoft.com/office/drawing/2014/main" id="{31244E38-A225-47E5-B72A-333D0F1A9248}"/>
+                <a16:creationId xmlns:a16="http://schemas.microsoft.com/office/drawing/2014/main" id="{C746092E-4D12-4BD1-9644-D4588F687903}"/>
               </a:ext>
             </a:extLst>
           </p:cNvPr>
@@ -6907,7 +6907,7 @@
           <p:cNvPr id="3" name="">
             <a:extLst xmlns:a="http://schemas.openxmlformats.org/drawingml/2006/main">
               <a:ext uri="{FF2B5EF4-FFF2-40B4-BE49-F238E27FC236}">
-                <a16:creationId xmlns:a16="http://schemas.microsoft.com/office/drawing/2014/main" id="{FE0ED9DE-A905-4F59-85EA-2CBED7DF6F29}"/>
+                <a16:creationId xmlns:a16="http://schemas.microsoft.com/office/drawing/2014/main" id="{5F84237C-BD34-49A1-A044-46C71C6A49C7}"/>
               </a:ext>
             </a:extLst>
           </p:cNvPr>
@@ -6939,7 +6939,7 @@
           <p:cNvPr id="4" name="">
             <a:extLst xmlns:a="http://schemas.openxmlformats.org/drawingml/2006/main">
               <a:ext uri="{FF2B5EF4-FFF2-40B4-BE49-F238E27FC236}">
-                <a16:creationId xmlns:a16="http://schemas.microsoft.com/office/drawing/2014/main" id="{BCBBEED7-A687-4612-ADE5-548D949C1241}"/>
+                <a16:creationId xmlns:a16="http://schemas.microsoft.com/office/drawing/2014/main" id="{A959BBF3-9565-4B44-9F5E-F64EA8D47D38}"/>
               </a:ext>
             </a:extLst>
           </p:cNvPr>
@@ -6996,7 +6996,7 @@
           <p:cNvPr id="5" name="">
             <a:extLst xmlns:a="http://schemas.openxmlformats.org/drawingml/2006/main">
               <a:ext uri="{FF2B5EF4-FFF2-40B4-BE49-F238E27FC236}">
-                <a16:creationId xmlns:a16="http://schemas.microsoft.com/office/drawing/2014/main" id="{35786070-9E13-461E-A5F6-EA343BC3F438}"/>
+                <a16:creationId xmlns:a16="http://schemas.microsoft.com/office/drawing/2014/main" id="{0E9EE833-2C41-45C4-B79A-39025F1E2CED}"/>
               </a:ext>
             </a:extLst>
           </p:cNvPr>
@@ -7053,7 +7053,7 @@
           <p:cNvPr id="6" name="">
             <a:extLst xmlns:a="http://schemas.openxmlformats.org/drawingml/2006/main">
               <a:ext uri="{FF2B5EF4-FFF2-40B4-BE49-F238E27FC236}">
-                <a16:creationId xmlns:a16="http://schemas.microsoft.com/office/drawing/2014/main" id="{DBB5F1D3-1A1B-4557-BCB8-97FB0D9E61A4}"/>
+                <a16:creationId xmlns:a16="http://schemas.microsoft.com/office/drawing/2014/main" id="{A24AF75E-C210-4592-9A7D-1E681CC596F3}"/>
               </a:ext>
             </a:extLst>
           </p:cNvPr>
@@ -7110,7 +7110,7 @@
           <p:cNvPr id="7" name="">
             <a:extLst xmlns:a="http://schemas.openxmlformats.org/drawingml/2006/main">
               <a:ext uri="{FF2B5EF4-FFF2-40B4-BE49-F238E27FC236}">
-                <a16:creationId xmlns:a16="http://schemas.microsoft.com/office/drawing/2014/main" id="{EB1F0CA8-C799-422E-8D38-66424A93FE83}"/>
+                <a16:creationId xmlns:a16="http://schemas.microsoft.com/office/drawing/2014/main" id="{EA4A4A17-7DBA-4800-A3E8-096F39D14C79}"/>
               </a:ext>
             </a:extLst>
           </p:cNvPr>
@@ -7142,7 +7142,7 @@
           <p:cNvPr id="8" name="">
             <a:extLst xmlns:a="http://schemas.openxmlformats.org/drawingml/2006/main">
               <a:ext uri="{FF2B5EF4-FFF2-40B4-BE49-F238E27FC236}">
-                <a16:creationId xmlns:a16="http://schemas.microsoft.com/office/drawing/2014/main" id="{4E3F68DA-2A25-48C9-8BBB-225AC003D123}"/>
+                <a16:creationId xmlns:a16="http://schemas.microsoft.com/office/drawing/2014/main" id="{E9AA78BB-986F-47C1-A2CE-4847C7BCA86E}"/>
               </a:ext>
             </a:extLst>
           </p:cNvPr>
@@ -7199,7 +7199,7 @@
           <p:cNvPr id="9" name="">
             <a:extLst xmlns:a="http://schemas.openxmlformats.org/drawingml/2006/main">
               <a:ext uri="{FF2B5EF4-FFF2-40B4-BE49-F238E27FC236}">
-                <a16:creationId xmlns:a16="http://schemas.microsoft.com/office/drawing/2014/main" id="{FE36FC36-B371-4B95-B2F2-905834239EB7}"/>
+                <a16:creationId xmlns:a16="http://schemas.microsoft.com/office/drawing/2014/main" id="{018196C2-88EF-409A-BBEC-2362546335DA}"/>
               </a:ext>
             </a:extLst>
           </p:cNvPr>
@@ -7256,7 +7256,7 @@
           <p:cNvPr id="10" name="">
             <a:extLst xmlns:a="http://schemas.openxmlformats.org/drawingml/2006/main">
               <a:ext uri="{FF2B5EF4-FFF2-40B4-BE49-F238E27FC236}">
-                <a16:creationId xmlns:a16="http://schemas.microsoft.com/office/drawing/2014/main" id="{ECC03657-B1A0-43C3-9098-093960247A5A}"/>
+                <a16:creationId xmlns:a16="http://schemas.microsoft.com/office/drawing/2014/main" id="{7E8C25BD-7466-4E4F-9AB6-51287AF1EAD4}"/>
               </a:ext>
             </a:extLst>
           </p:cNvPr>
@@ -7313,7 +7313,7 @@
           <p:cNvPr id="11" name="">
             <a:extLst xmlns:a="http://schemas.openxmlformats.org/drawingml/2006/main">
               <a:ext uri="{FF2B5EF4-FFF2-40B4-BE49-F238E27FC236}">
-                <a16:creationId xmlns:a16="http://schemas.microsoft.com/office/drawing/2014/main" id="{A3AC8560-CAC2-4837-9138-5CB8B3314EA1}"/>
+                <a16:creationId xmlns:a16="http://schemas.microsoft.com/office/drawing/2014/main" id="{36D3056A-6E9F-4670-90A0-4E44B8164AEC}"/>
               </a:ext>
             </a:extLst>
           </p:cNvPr>
@@ -7345,7 +7345,7 @@
           <p:cNvPr id="12" name="">
             <a:extLst xmlns:a="http://schemas.openxmlformats.org/drawingml/2006/main">
               <a:ext uri="{FF2B5EF4-FFF2-40B4-BE49-F238E27FC236}">
-                <a16:creationId xmlns:a16="http://schemas.microsoft.com/office/drawing/2014/main" id="{6C51DD65-9023-4A64-831A-B82C846D6E53}"/>
+                <a16:creationId xmlns:a16="http://schemas.microsoft.com/office/drawing/2014/main" id="{CA5BB346-8DC3-40CE-AD35-7C5E284A53B5}"/>
               </a:ext>
             </a:extLst>
           </p:cNvPr>
@@ -7402,7 +7402,7 @@
           <p:cNvPr id="13" name="">
             <a:extLst xmlns:a="http://schemas.openxmlformats.org/drawingml/2006/main">
               <a:ext uri="{FF2B5EF4-FFF2-40B4-BE49-F238E27FC236}">
-                <a16:creationId xmlns:a16="http://schemas.microsoft.com/office/drawing/2014/main" id="{FF4DE027-F7EA-45F9-9FBB-F8B8E91488C8}"/>
+                <a16:creationId xmlns:a16="http://schemas.microsoft.com/office/drawing/2014/main" id="{EFFDC803-21BB-4AF8-8684-0109DCD0A49D}"/>
               </a:ext>
             </a:extLst>
           </p:cNvPr>
@@ -7459,7 +7459,7 @@
           <p:cNvPr id="14" name="">
             <a:extLst xmlns:a="http://schemas.openxmlformats.org/drawingml/2006/main">
               <a:ext uri="{FF2B5EF4-FFF2-40B4-BE49-F238E27FC236}">
-                <a16:creationId xmlns:a16="http://schemas.microsoft.com/office/drawing/2014/main" id="{2AD3B62A-3288-4B2A-848E-A540B283F9E8}"/>
+                <a16:creationId xmlns:a16="http://schemas.microsoft.com/office/drawing/2014/main" id="{CF597EE6-33A1-4BCD-AC6E-35141C1521D0}"/>
               </a:ext>
             </a:extLst>
           </p:cNvPr>
@@ -7516,7 +7516,7 @@
           <p:cNvPr id="15" name="">
             <a:extLst xmlns:a="http://schemas.openxmlformats.org/drawingml/2006/main">
               <a:ext uri="{FF2B5EF4-FFF2-40B4-BE49-F238E27FC236}">
-                <a16:creationId xmlns:a16="http://schemas.microsoft.com/office/drawing/2014/main" id="{0B9A957C-EC40-4C76-A6BE-193B72A9C89E}"/>
+                <a16:creationId xmlns:a16="http://schemas.microsoft.com/office/drawing/2014/main" id="{8D10FE96-7EEC-4D9D-BC16-1F61729936DB}"/>
               </a:ext>
             </a:extLst>
           </p:cNvPr>
@@ -7571,7 +7571,7 @@
     </p:spTree>
     <p:extLst>
       <p:ext uri="{BB962C8B-B14F-4D97-AF65-F5344CB8AC3E}">
-        <p14:creationId xmlns:p14="http://schemas.microsoft.com/office/powerpoint/2010/main" val="263677172"/>
+        <p14:creationId xmlns:p14="http://schemas.microsoft.com/office/powerpoint/2010/main" val="451608586"/>
       </p:ext>
     </p:extLst>
   </p:cSld>
@@ -7769,10 +7769,10 @@
       </p:grpSpPr>
       <p:sp>
         <p:nvSpPr>
-          <p:cNvPr id="23" name="">
-            <a:extLst xmlns:a="http://schemas.openxmlformats.org/drawingml/2006/main">
-              <a:ext uri="{FF2B5EF4-FFF2-40B4-BE49-F238E27FC236}">
-                <a16:creationId xmlns:a16="http://schemas.microsoft.com/office/drawing/2014/main" id="{CBAE29F9-7621-4B9F-9962-EEB3FAA4A4BB}"/>
+          <p:cNvPr id="26" name="">
+            <a:extLst xmlns:a="http://schemas.openxmlformats.org/drawingml/2006/main">
+              <a:ext uri="{FF2B5EF4-FFF2-40B4-BE49-F238E27FC236}">
+                <a16:creationId xmlns:a16="http://schemas.microsoft.com/office/drawing/2014/main" id="{5AEAEFB9-5166-4754-9C5F-3AAE2656DE21}"/>
               </a:ext>
             </a:extLst>
           </p:cNvPr>
@@ -7804,7 +7804,7 @@
           <p:cNvPr id="2" name="">
             <a:extLst xmlns:a="http://schemas.openxmlformats.org/drawingml/2006/main">
               <a:ext uri="{FF2B5EF4-FFF2-40B4-BE49-F238E27FC236}">
-                <a16:creationId xmlns:a16="http://schemas.microsoft.com/office/drawing/2014/main" id="{204CB4C6-E11D-4844-BEA8-1EC91FEE53A6}"/>
+                <a16:creationId xmlns:a16="http://schemas.microsoft.com/office/drawing/2014/main" id="{98D35EF0-DF0F-4887-80CD-36326EC368A1}"/>
               </a:ext>
             </a:extLst>
           </p:cNvPr>
@@ -7861,7 +7861,7 @@
           <p:cNvPr id="3" name="">
             <a:extLst xmlns:a="http://schemas.openxmlformats.org/drawingml/2006/main">
               <a:ext uri="{FF2B5EF4-FFF2-40B4-BE49-F238E27FC236}">
-                <a16:creationId xmlns:a16="http://schemas.microsoft.com/office/drawing/2014/main" id="{306B7361-6BCF-459C-8DA8-2B190B19D46D}"/>
+                <a16:creationId xmlns:a16="http://schemas.microsoft.com/office/drawing/2014/main" id="{B3A8858C-1AAF-484D-8A64-6972FBC51AD0}"/>
               </a:ext>
             </a:extLst>
           </p:cNvPr>
@@ -7893,7 +7893,7 @@
           <p:cNvPr id="4" name="">
             <a:extLst xmlns:a="http://schemas.openxmlformats.org/drawingml/2006/main">
               <a:ext uri="{FF2B5EF4-FFF2-40B4-BE49-F238E27FC236}">
-                <a16:creationId xmlns:a16="http://schemas.microsoft.com/office/drawing/2014/main" id="{8B6E8D58-3E84-4E2F-A130-44C88EDE5272}"/>
+                <a16:creationId xmlns:a16="http://schemas.microsoft.com/office/drawing/2014/main" id="{CB890C1F-39B5-44B8-B0C8-A6552AE9DC20}"/>
               </a:ext>
             </a:extLst>
           </p:cNvPr>
@@ -7950,7 +7950,7 @@
           <p:cNvPr id="5" name="">
             <a:extLst xmlns:a="http://schemas.openxmlformats.org/drawingml/2006/main">
               <a:ext uri="{FF2B5EF4-FFF2-40B4-BE49-F238E27FC236}">
-                <a16:creationId xmlns:a16="http://schemas.microsoft.com/office/drawing/2014/main" id="{C42EDE0E-E10B-4AD5-8262-7B83176F84CB}"/>
+                <a16:creationId xmlns:a16="http://schemas.microsoft.com/office/drawing/2014/main" id="{A0D24778-D560-4108-AFCB-417E2FE901B1}"/>
               </a:ext>
             </a:extLst>
           </p:cNvPr>
@@ -8007,7 +8007,7 @@
           <p:cNvPr id="6" name="">
             <a:extLst xmlns:a="http://schemas.openxmlformats.org/drawingml/2006/main">
               <a:ext uri="{FF2B5EF4-FFF2-40B4-BE49-F238E27FC236}">
-                <a16:creationId xmlns:a16="http://schemas.microsoft.com/office/drawing/2014/main" id="{0F8D514F-434D-4406-B055-237EED13D54D}"/>
+                <a16:creationId xmlns:a16="http://schemas.microsoft.com/office/drawing/2014/main" id="{C7CE8232-CA27-4F99-B039-BBF8166BE03F}"/>
               </a:ext>
             </a:extLst>
           </p:cNvPr>
@@ -8064,7 +8064,7 @@
           <p:cNvPr id="7" name="">
             <a:extLst xmlns:a="http://schemas.openxmlformats.org/drawingml/2006/main">
               <a:ext uri="{FF2B5EF4-FFF2-40B4-BE49-F238E27FC236}">
-                <a16:creationId xmlns:a16="http://schemas.microsoft.com/office/drawing/2014/main" id="{4B7AB5D4-8866-462A-A0E2-38A98BADDB02}"/>
+                <a16:creationId xmlns:a16="http://schemas.microsoft.com/office/drawing/2014/main" id="{45C4EA13-3B0C-4C52-B14E-18D05A7FA85B}"/>
               </a:ext>
             </a:extLst>
           </p:cNvPr>
@@ -8096,7 +8096,7 @@
           <p:cNvPr id="8" name="">
             <a:extLst xmlns:a="http://schemas.openxmlformats.org/drawingml/2006/main">
               <a:ext uri="{FF2B5EF4-FFF2-40B4-BE49-F238E27FC236}">
-                <a16:creationId xmlns:a16="http://schemas.microsoft.com/office/drawing/2014/main" id="{0DB0F6C0-0F4C-4933-AB70-89561E376341}"/>
+                <a16:creationId xmlns:a16="http://schemas.microsoft.com/office/drawing/2014/main" id="{BECD3F2E-FB5C-48E9-9E7E-D15D703DAB30}"/>
               </a:ext>
             </a:extLst>
           </p:cNvPr>
@@ -8153,7 +8153,7 @@
           <p:cNvPr id="9" name="">
             <a:extLst xmlns:a="http://schemas.openxmlformats.org/drawingml/2006/main">
               <a:ext uri="{FF2B5EF4-FFF2-40B4-BE49-F238E27FC236}">
-                <a16:creationId xmlns:a16="http://schemas.microsoft.com/office/drawing/2014/main" id="{80AC3F00-F3B3-4323-A6ED-CD4266DB5D02}"/>
+                <a16:creationId xmlns:a16="http://schemas.microsoft.com/office/drawing/2014/main" id="{4C3B2078-2B8D-4B07-BF81-257241C21712}"/>
               </a:ext>
             </a:extLst>
           </p:cNvPr>
@@ -8210,19 +8210,19 @@
           <p:cNvPr id="10" name="">
             <a:extLst xmlns:a="http://schemas.openxmlformats.org/drawingml/2006/main">
               <a:ext uri="{FF2B5EF4-FFF2-40B4-BE49-F238E27FC236}">
-                <a16:creationId xmlns:a16="http://schemas.microsoft.com/office/drawing/2014/main" id="{ECBCE5F9-F5EE-4410-90F9-FDE7B4C39B32}"/>
-              </a:ext>
-            </a:extLst>
-          </p:cNvPr>
-          <p:cNvSpPr>
-            <a:spLocks xmlns:a="http://schemas.openxmlformats.org/drawingml/2006/main" noGrp="1"/>
-          </p:cNvSpPr>
-          <p:nvPr/>
-        </p:nvSpPr>
-        <p:spPr>
-          <a:xfrm xmlns:a="http://schemas.openxmlformats.org/drawingml/2006/main">
-            <a:off x="914400" y="1257300"/>
-            <a:ext cx="10363200" cy="781050"/>
+                <a16:creationId xmlns:a16="http://schemas.microsoft.com/office/drawing/2014/main" id="{2606691C-93BF-4883-8705-E8A2D27054CD}"/>
+              </a:ext>
+            </a:extLst>
+          </p:cNvPr>
+          <p:cNvSpPr>
+            <a:spLocks xmlns:a="http://schemas.openxmlformats.org/drawingml/2006/main" noGrp="1"/>
+          </p:cNvSpPr>
+          <p:nvPr/>
+        </p:nvSpPr>
+        <p:spPr>
+          <a:xfrm xmlns:a="http://schemas.openxmlformats.org/drawingml/2006/main">
+            <a:off x="857250" y="1219200"/>
+            <a:ext cx="10477500" cy="742950"/>
           </a:xfrm>
           <a:prstGeom xmlns:a="http://schemas.openxmlformats.org/drawingml/2006/main" prst="rect">
             <a:avLst/>
@@ -8239,7 +8239,7 @@
           <a:lstStyle xmlns:a="http://schemas.openxmlformats.org/drawingml/2006/main"/>
           <a:p xmlns:a="http://schemas.openxmlformats.org/drawingml/2006/main">
             <a:pPr algn="ctr">
-              <a:defRPr sz="2175" b="1">
+              <a:defRPr sz="2100" b="1">
                 <a:solidFill>
                   <a:srgbClr val="17253A"/>
                 </a:solidFill>
@@ -8249,7 +8249,7 @@
               </a:defRPr>
             </a:pPr>
             <a:r>
-              <a:rPr sz="2175" b="1">
+              <a:rPr sz="2100" b="1">
                 <a:solidFill>
                   <a:srgbClr val="17253A"/>
                 </a:solidFill>
@@ -8267,28 +8267,30 @@
           <p:cNvPr id="11" name="">
             <a:extLst xmlns:a="http://schemas.openxmlformats.org/drawingml/2006/main">
               <a:ext uri="{FF2B5EF4-FFF2-40B4-BE49-F238E27FC236}">
-                <a16:creationId xmlns:a16="http://schemas.microsoft.com/office/drawing/2014/main" id="{7A66C8E7-235A-4907-BE61-6C864CB86DDB}"/>
-              </a:ext>
-            </a:extLst>
-          </p:cNvPr>
-          <p:cNvSpPr>
-            <a:spLocks xmlns:a="http://schemas.openxmlformats.org/drawingml/2006/main" noGrp="1"/>
-          </p:cNvSpPr>
-          <p:nvPr/>
-        </p:nvSpPr>
-        <p:spPr>
-          <a:xfrm xmlns:a="http://schemas.openxmlformats.org/drawingml/2006/main">
-            <a:off x="1000125" y="2247900"/>
-            <a:ext cx="476250" cy="476250"/>
-          </a:xfrm>
-          <a:prstGeom xmlns:a="http://schemas.openxmlformats.org/drawingml/2006/main" prst="ellipse">
+                <a16:creationId xmlns:a16="http://schemas.microsoft.com/office/drawing/2014/main" id="{46EAC335-AAA7-4257-92DA-9B4EB1718427}"/>
+              </a:ext>
+            </a:extLst>
+          </p:cNvPr>
+          <p:cNvSpPr>
+            <a:spLocks xmlns:a="http://schemas.openxmlformats.org/drawingml/2006/main" noGrp="1"/>
+          </p:cNvSpPr>
+          <p:nvPr/>
+        </p:nvSpPr>
+        <p:spPr>
+          <a:xfrm xmlns:a="http://schemas.openxmlformats.org/drawingml/2006/main">
+            <a:off x="971550" y="2124075"/>
+            <a:ext cx="38100" cy="3524250"/>
+          </a:xfrm>
+          <a:prstGeom xmlns:a="http://schemas.openxmlformats.org/drawingml/2006/main" prst="rect">
             <a:avLst/>
           </a:prstGeom>
           <a:solidFill xmlns:a="http://schemas.openxmlformats.org/drawingml/2006/main">
-            <a:srgbClr val="18324A"/>
+            <a:srgbClr val="2C6E73"/>
           </a:solidFill>
           <a:ln xmlns:a="http://schemas.openxmlformats.org/drawingml/2006/main" w="0">
-            <a:noFill/>
+            <a:solidFill>
+              <a:srgbClr val="2C6E73"/>
+            </a:solidFill>
           </a:ln>
         </p:spPr>
       </p:sp>
@@ -8297,19 +8299,19 @@
           <p:cNvPr id="12" name="">
             <a:extLst xmlns:a="http://schemas.openxmlformats.org/drawingml/2006/main">
               <a:ext uri="{FF2B5EF4-FFF2-40B4-BE49-F238E27FC236}">
-                <a16:creationId xmlns:a16="http://schemas.microsoft.com/office/drawing/2014/main" id="{48CFCBF6-AC35-490D-A1B9-86481E213524}"/>
-              </a:ext>
-            </a:extLst>
-          </p:cNvPr>
-          <p:cNvSpPr>
-            <a:spLocks xmlns:a="http://schemas.openxmlformats.org/drawingml/2006/main" noGrp="1"/>
-          </p:cNvSpPr>
-          <p:nvPr/>
-        </p:nvSpPr>
-        <p:spPr>
-          <a:xfrm xmlns:a="http://schemas.openxmlformats.org/drawingml/2006/main">
-            <a:off x="1000125" y="2276475"/>
-            <a:ext cx="476250" cy="419100"/>
+                <a16:creationId xmlns:a16="http://schemas.microsoft.com/office/drawing/2014/main" id="{A6E23729-C5AD-4B44-AF4D-0454575691BE}"/>
+              </a:ext>
+            </a:extLst>
+          </p:cNvPr>
+          <p:cNvSpPr>
+            <a:spLocks xmlns:a="http://schemas.openxmlformats.org/drawingml/2006/main" noGrp="1"/>
+          </p:cNvSpPr>
+          <p:nvPr/>
+        </p:nvSpPr>
+        <p:spPr>
+          <a:xfrm xmlns:a="http://schemas.openxmlformats.org/drawingml/2006/main">
+            <a:off x="1162050" y="2200275"/>
+            <a:ext cx="400050" cy="400050"/>
           </a:xfrm>
           <a:prstGeom xmlns:a="http://schemas.openxmlformats.org/drawingml/2006/main" prst="rect">
             <a:avLst/>
@@ -8326,9 +8328,9 @@
           <a:lstStyle xmlns:a="http://schemas.openxmlformats.org/drawingml/2006/main"/>
           <a:p xmlns:a="http://schemas.openxmlformats.org/drawingml/2006/main">
             <a:pPr algn="ctr">
-              <a:defRPr sz="1350" b="1">
-                <a:solidFill>
-                  <a:srgbClr val="FFFFFF"/>
+              <a:defRPr sz="1125" b="1">
+                <a:solidFill>
+                  <a:srgbClr val="2C6E73"/>
                 </a:solidFill>
                 <a:latin typeface="Arial"/>
                 <a:ea typeface="Arial"/>
@@ -8336,9 +8338,9 @@
               </a:defRPr>
             </a:pPr>
             <a:r>
-              <a:rPr sz="1350" b="1">
-                <a:solidFill>
-                  <a:srgbClr val="FFFFFF"/>
+              <a:rPr sz="1125" b="1">
+                <a:solidFill>
+                  <a:srgbClr val="2C6E73"/>
                 </a:solidFill>
                 <a:latin typeface="Arial"/>
                 <a:ea typeface="Arial"/>
@@ -8354,19 +8356,19 @@
           <p:cNvPr id="13" name="">
             <a:extLst xmlns:a="http://schemas.openxmlformats.org/drawingml/2006/main">
               <a:ext uri="{FF2B5EF4-FFF2-40B4-BE49-F238E27FC236}">
-                <a16:creationId xmlns:a16="http://schemas.microsoft.com/office/drawing/2014/main" id="{8DD4D804-948F-475B-9B1E-B5DC8FFBCF61}"/>
-              </a:ext>
-            </a:extLst>
-          </p:cNvPr>
-          <p:cNvSpPr>
-            <a:spLocks xmlns:a="http://schemas.openxmlformats.org/drawingml/2006/main" noGrp="1"/>
-          </p:cNvSpPr>
-          <p:nvPr/>
-        </p:nvSpPr>
-        <p:spPr>
-          <a:xfrm xmlns:a="http://schemas.openxmlformats.org/drawingml/2006/main">
-            <a:off x="1714500" y="2181225"/>
-            <a:ext cx="9429750" cy="609600"/>
+                <a16:creationId xmlns:a16="http://schemas.microsoft.com/office/drawing/2014/main" id="{8EA5339F-A7E3-422E-9BDF-D120DFC418C5}"/>
+              </a:ext>
+            </a:extLst>
+          </p:cNvPr>
+          <p:cNvSpPr>
+            <a:spLocks xmlns:a="http://schemas.openxmlformats.org/drawingml/2006/main" noGrp="1"/>
+          </p:cNvSpPr>
+          <p:nvPr/>
+        </p:nvSpPr>
+        <p:spPr>
+          <a:xfrm xmlns:a="http://schemas.openxmlformats.org/drawingml/2006/main">
+            <a:off x="1714500" y="2114550"/>
+            <a:ext cx="9525000" cy="638175"/>
           </a:xfrm>
           <a:prstGeom xmlns:a="http://schemas.openxmlformats.org/drawingml/2006/main" prst="rect">
             <a:avLst/>
@@ -8383,7 +8385,7 @@
           <a:lstStyle xmlns:a="http://schemas.openxmlformats.org/drawingml/2006/main"/>
           <a:p xmlns:a="http://schemas.openxmlformats.org/drawingml/2006/main">
             <a:pPr algn="l">
-              <a:defRPr sz="1500" b="0">
+              <a:defRPr sz="1575" b="0">
                 <a:solidFill>
                   <a:srgbClr val="17253A"/>
                 </a:solidFill>
@@ -8393,7 +8395,7 @@
               </a:defRPr>
             </a:pPr>
             <a:r>
-              <a:rPr sz="1500" b="0">
+              <a:rPr sz="1575" b="0">
                 <a:solidFill>
                   <a:srgbClr val="17253A"/>
                 </a:solidFill>
@@ -8401,7 +8403,7 @@
                 <a:ea typeface="Arial"/>
                 <a:cs typeface="Arial"/>
               </a:rPr>
-              <a:t>Identify the structure: Align digits by place value and include placeholder zeros.</a:t>
+              <a:t>50.000 - 17.485</a:t>
             </a:r>
           </a:p>
         </p:txBody>
@@ -8411,28 +8413,30 @@
           <p:cNvPr id="14" name="">
             <a:extLst xmlns:a="http://schemas.openxmlformats.org/drawingml/2006/main">
               <a:ext uri="{FF2B5EF4-FFF2-40B4-BE49-F238E27FC236}">
-                <a16:creationId xmlns:a16="http://schemas.microsoft.com/office/drawing/2014/main" id="{647D4B56-8515-4484-A060-B40F11991CC3}"/>
-              </a:ext>
-            </a:extLst>
-          </p:cNvPr>
-          <p:cNvSpPr>
-            <a:spLocks xmlns:a="http://schemas.openxmlformats.org/drawingml/2006/main" noGrp="1"/>
-          </p:cNvSpPr>
-          <p:nvPr/>
-        </p:nvSpPr>
-        <p:spPr>
-          <a:xfrm xmlns:a="http://schemas.openxmlformats.org/drawingml/2006/main">
-            <a:off x="1000125" y="2990850"/>
-            <a:ext cx="476250" cy="476250"/>
-          </a:xfrm>
-          <a:prstGeom xmlns:a="http://schemas.openxmlformats.org/drawingml/2006/main" prst="ellipse">
+                <a16:creationId xmlns:a16="http://schemas.microsoft.com/office/drawing/2014/main" id="{D1D76DB2-24E9-4484-AB17-34A1B2FF3505}"/>
+              </a:ext>
+            </a:extLst>
+          </p:cNvPr>
+          <p:cNvSpPr>
+            <a:spLocks xmlns:a="http://schemas.openxmlformats.org/drawingml/2006/main" noGrp="1"/>
+          </p:cNvSpPr>
+          <p:nvPr/>
+        </p:nvSpPr>
+        <p:spPr>
+          <a:xfrm xmlns:a="http://schemas.openxmlformats.org/drawingml/2006/main">
+            <a:off x="1714500" y="2771775"/>
+            <a:ext cx="9334500" cy="9525"/>
+          </a:xfrm>
+          <a:prstGeom xmlns:a="http://schemas.openxmlformats.org/drawingml/2006/main" prst="rect">
             <a:avLst/>
           </a:prstGeom>
           <a:solidFill xmlns:a="http://schemas.openxmlformats.org/drawingml/2006/main">
-            <a:srgbClr val="2C6E73"/>
+            <a:srgbClr val="D9E0E6"/>
           </a:solidFill>
           <a:ln xmlns:a="http://schemas.openxmlformats.org/drawingml/2006/main" w="0">
-            <a:noFill/>
+            <a:solidFill>
+              <a:srgbClr val="D9E0E6"/>
+            </a:solidFill>
           </a:ln>
         </p:spPr>
       </p:sp>
@@ -8441,19 +8445,19 @@
           <p:cNvPr id="15" name="">
             <a:extLst xmlns:a="http://schemas.openxmlformats.org/drawingml/2006/main">
               <a:ext uri="{FF2B5EF4-FFF2-40B4-BE49-F238E27FC236}">
-                <a16:creationId xmlns:a16="http://schemas.microsoft.com/office/drawing/2014/main" id="{B86B422B-5474-4646-A12A-2FC6E44816BF}"/>
-              </a:ext>
-            </a:extLst>
-          </p:cNvPr>
-          <p:cNvSpPr>
-            <a:spLocks xmlns:a="http://schemas.openxmlformats.org/drawingml/2006/main" noGrp="1"/>
-          </p:cNvSpPr>
-          <p:nvPr/>
-        </p:nvSpPr>
-        <p:spPr>
-          <a:xfrm xmlns:a="http://schemas.openxmlformats.org/drawingml/2006/main">
-            <a:off x="1000125" y="3019425"/>
-            <a:ext cx="476250" cy="419100"/>
+                <a16:creationId xmlns:a16="http://schemas.microsoft.com/office/drawing/2014/main" id="{87B00D7B-BDA8-412F-8C7A-2E67240CA879}"/>
+              </a:ext>
+            </a:extLst>
+          </p:cNvPr>
+          <p:cNvSpPr>
+            <a:spLocks xmlns:a="http://schemas.openxmlformats.org/drawingml/2006/main" noGrp="1"/>
+          </p:cNvSpPr>
+          <p:nvPr/>
+        </p:nvSpPr>
+        <p:spPr>
+          <a:xfrm xmlns:a="http://schemas.openxmlformats.org/drawingml/2006/main">
+            <a:off x="1162050" y="2905125"/>
+            <a:ext cx="400050" cy="400050"/>
           </a:xfrm>
           <a:prstGeom xmlns:a="http://schemas.openxmlformats.org/drawingml/2006/main" prst="rect">
             <a:avLst/>
@@ -8470,9 +8474,9 @@
           <a:lstStyle xmlns:a="http://schemas.openxmlformats.org/drawingml/2006/main"/>
           <a:p xmlns:a="http://schemas.openxmlformats.org/drawingml/2006/main">
             <a:pPr algn="ctr">
-              <a:defRPr sz="1350" b="1">
-                <a:solidFill>
-                  <a:srgbClr val="FFFFFF"/>
+              <a:defRPr sz="1125" b="1">
+                <a:solidFill>
+                  <a:srgbClr val="2C6E73"/>
                 </a:solidFill>
                 <a:latin typeface="Arial"/>
                 <a:ea typeface="Arial"/>
@@ -8480,9 +8484,9 @@
               </a:defRPr>
             </a:pPr>
             <a:r>
-              <a:rPr sz="1350" b="1">
-                <a:solidFill>
-                  <a:srgbClr val="FFFFFF"/>
+              <a:rPr sz="1125" b="1">
+                <a:solidFill>
+                  <a:srgbClr val="2C6E73"/>
                 </a:solidFill>
                 <a:latin typeface="Arial"/>
                 <a:ea typeface="Arial"/>
@@ -8498,19 +8502,19 @@
           <p:cNvPr id="16" name="">
             <a:extLst xmlns:a="http://schemas.openxmlformats.org/drawingml/2006/main">
               <a:ext uri="{FF2B5EF4-FFF2-40B4-BE49-F238E27FC236}">
-                <a16:creationId xmlns:a16="http://schemas.microsoft.com/office/drawing/2014/main" id="{8EA035A8-D0E1-4EB8-84D0-C48848C4039E}"/>
-              </a:ext>
-            </a:extLst>
-          </p:cNvPr>
-          <p:cNvSpPr>
-            <a:spLocks xmlns:a="http://schemas.openxmlformats.org/drawingml/2006/main" noGrp="1"/>
-          </p:cNvSpPr>
-          <p:nvPr/>
-        </p:nvSpPr>
-        <p:spPr>
-          <a:xfrm xmlns:a="http://schemas.openxmlformats.org/drawingml/2006/main">
-            <a:off x="1714500" y="2924175"/>
-            <a:ext cx="9429750" cy="609600"/>
+                <a16:creationId xmlns:a16="http://schemas.microsoft.com/office/drawing/2014/main" id="{D1A49D18-6D5D-49AB-A9EC-769D9A3D96AB}"/>
+              </a:ext>
+            </a:extLst>
+          </p:cNvPr>
+          <p:cNvSpPr>
+            <a:spLocks xmlns:a="http://schemas.openxmlformats.org/drawingml/2006/main" noGrp="1"/>
+          </p:cNvSpPr>
+          <p:nvPr/>
+        </p:nvSpPr>
+        <p:spPr>
+          <a:xfrm xmlns:a="http://schemas.openxmlformats.org/drawingml/2006/main">
+            <a:off x="1714500" y="2819400"/>
+            <a:ext cx="9525000" cy="638175"/>
           </a:xfrm>
           <a:prstGeom xmlns:a="http://schemas.openxmlformats.org/drawingml/2006/main" prst="rect">
             <a:avLst/>
@@ -8527,7 +8531,7 @@
           <a:lstStyle xmlns:a="http://schemas.openxmlformats.org/drawingml/2006/main"/>
           <a:p xmlns:a="http://schemas.openxmlformats.org/drawingml/2006/main">
             <a:pPr algn="l">
-              <a:defRPr sz="1500" b="0">
+              <a:defRPr sz="1575" b="0">
                 <a:solidFill>
                   <a:srgbClr val="17253A"/>
                 </a:solidFill>
@@ -8537,7 +8541,7 @@
               </a:defRPr>
             </a:pPr>
             <a:r>
-              <a:rPr sz="1500" b="0">
+              <a:rPr sz="1575" b="0">
                 <a:solidFill>
                   <a:srgbClr val="17253A"/>
                 </a:solidFill>
@@ -8545,7 +8549,7 @@
                 <a:ea typeface="Arial"/>
                 <a:cs typeface="Arial"/>
               </a:rPr>
-              <a:t>Set up the method: Calculate using the chosen mental or written method.</a:t>
+              <a:t>50.000 = 49.000 + 1.000</a:t>
             </a:r>
           </a:p>
         </p:txBody>
@@ -8555,28 +8559,30 @@
           <p:cNvPr id="17" name="">
             <a:extLst xmlns:a="http://schemas.openxmlformats.org/drawingml/2006/main">
               <a:ext uri="{FF2B5EF4-FFF2-40B4-BE49-F238E27FC236}">
-                <a16:creationId xmlns:a16="http://schemas.microsoft.com/office/drawing/2014/main" id="{5F4724A3-ADF2-4563-938F-8846E6390D23}"/>
-              </a:ext>
-            </a:extLst>
-          </p:cNvPr>
-          <p:cNvSpPr>
-            <a:spLocks xmlns:a="http://schemas.openxmlformats.org/drawingml/2006/main" noGrp="1"/>
-          </p:cNvSpPr>
-          <p:nvPr/>
-        </p:nvSpPr>
-        <p:spPr>
-          <a:xfrm xmlns:a="http://schemas.openxmlformats.org/drawingml/2006/main">
-            <a:off x="1000125" y="3733800"/>
-            <a:ext cx="476250" cy="476250"/>
-          </a:xfrm>
-          <a:prstGeom xmlns:a="http://schemas.openxmlformats.org/drawingml/2006/main" prst="ellipse">
+                <a16:creationId xmlns:a16="http://schemas.microsoft.com/office/drawing/2014/main" id="{3FAFBF80-4FFC-4C24-80D8-5BD91CDD65FD}"/>
+              </a:ext>
+            </a:extLst>
+          </p:cNvPr>
+          <p:cNvSpPr>
+            <a:spLocks xmlns:a="http://schemas.openxmlformats.org/drawingml/2006/main" noGrp="1"/>
+          </p:cNvSpPr>
+          <p:nvPr/>
+        </p:nvSpPr>
+        <p:spPr>
+          <a:xfrm xmlns:a="http://schemas.openxmlformats.org/drawingml/2006/main">
+            <a:off x="1714500" y="3476625"/>
+            <a:ext cx="9334500" cy="9525"/>
+          </a:xfrm>
+          <a:prstGeom xmlns:a="http://schemas.openxmlformats.org/drawingml/2006/main" prst="rect">
             <a:avLst/>
           </a:prstGeom>
           <a:solidFill xmlns:a="http://schemas.openxmlformats.org/drawingml/2006/main">
-            <a:srgbClr val="2C6E73"/>
+            <a:srgbClr val="D9E0E6"/>
           </a:solidFill>
           <a:ln xmlns:a="http://schemas.openxmlformats.org/drawingml/2006/main" w="0">
-            <a:noFill/>
+            <a:solidFill>
+              <a:srgbClr val="D9E0E6"/>
+            </a:solidFill>
           </a:ln>
         </p:spPr>
       </p:sp>
@@ -8585,19 +8591,19 @@
           <p:cNvPr id="18" name="">
             <a:extLst xmlns:a="http://schemas.openxmlformats.org/drawingml/2006/main">
               <a:ext uri="{FF2B5EF4-FFF2-40B4-BE49-F238E27FC236}">
-                <a16:creationId xmlns:a16="http://schemas.microsoft.com/office/drawing/2014/main" id="{C55A60F6-3152-42FF-8C82-954374070332}"/>
-              </a:ext>
-            </a:extLst>
-          </p:cNvPr>
-          <p:cNvSpPr>
-            <a:spLocks xmlns:a="http://schemas.openxmlformats.org/drawingml/2006/main" noGrp="1"/>
-          </p:cNvSpPr>
-          <p:nvPr/>
-        </p:nvSpPr>
-        <p:spPr>
-          <a:xfrm xmlns:a="http://schemas.openxmlformats.org/drawingml/2006/main">
-            <a:off x="1000125" y="3762375"/>
-            <a:ext cx="476250" cy="419100"/>
+                <a16:creationId xmlns:a16="http://schemas.microsoft.com/office/drawing/2014/main" id="{EB6008F0-070F-4A47-BD51-D12506A17EDA}"/>
+              </a:ext>
+            </a:extLst>
+          </p:cNvPr>
+          <p:cNvSpPr>
+            <a:spLocks xmlns:a="http://schemas.openxmlformats.org/drawingml/2006/main" noGrp="1"/>
+          </p:cNvSpPr>
+          <p:nvPr/>
+        </p:nvSpPr>
+        <p:spPr>
+          <a:xfrm xmlns:a="http://schemas.openxmlformats.org/drawingml/2006/main">
+            <a:off x="1162050" y="3609975"/>
+            <a:ext cx="400050" cy="400050"/>
           </a:xfrm>
           <a:prstGeom xmlns:a="http://schemas.openxmlformats.org/drawingml/2006/main" prst="rect">
             <a:avLst/>
@@ -8614,9 +8620,9 @@
           <a:lstStyle xmlns:a="http://schemas.openxmlformats.org/drawingml/2006/main"/>
           <a:p xmlns:a="http://schemas.openxmlformats.org/drawingml/2006/main">
             <a:pPr algn="ctr">
-              <a:defRPr sz="1350" b="1">
-                <a:solidFill>
-                  <a:srgbClr val="FFFFFF"/>
+              <a:defRPr sz="1125" b="1">
+                <a:solidFill>
+                  <a:srgbClr val="2C6E73"/>
                 </a:solidFill>
                 <a:latin typeface="Arial"/>
                 <a:ea typeface="Arial"/>
@@ -8624,9 +8630,9 @@
               </a:defRPr>
             </a:pPr>
             <a:r>
-              <a:rPr sz="1350" b="1">
-                <a:solidFill>
-                  <a:srgbClr val="FFFFFF"/>
+              <a:rPr sz="1125" b="1">
+                <a:solidFill>
+                  <a:srgbClr val="2C6E73"/>
                 </a:solidFill>
                 <a:latin typeface="Arial"/>
                 <a:ea typeface="Arial"/>
@@ -8642,19 +8648,19 @@
           <p:cNvPr id="19" name="">
             <a:extLst xmlns:a="http://schemas.openxmlformats.org/drawingml/2006/main">
               <a:ext uri="{FF2B5EF4-FFF2-40B4-BE49-F238E27FC236}">
-                <a16:creationId xmlns:a16="http://schemas.microsoft.com/office/drawing/2014/main" id="{7ABC62A8-CB93-4ABA-83E8-B82BC0A2ED5B}"/>
-              </a:ext>
-            </a:extLst>
-          </p:cNvPr>
-          <p:cNvSpPr>
-            <a:spLocks xmlns:a="http://schemas.openxmlformats.org/drawingml/2006/main" noGrp="1"/>
-          </p:cNvSpPr>
-          <p:nvPr/>
-        </p:nvSpPr>
-        <p:spPr>
-          <a:xfrm xmlns:a="http://schemas.openxmlformats.org/drawingml/2006/main">
-            <a:off x="1714500" y="3667125"/>
-            <a:ext cx="9429750" cy="609600"/>
+                <a16:creationId xmlns:a16="http://schemas.microsoft.com/office/drawing/2014/main" id="{7E0F00A4-FDE5-4DFA-AE0F-3D8DEC9DFCE2}"/>
+              </a:ext>
+            </a:extLst>
+          </p:cNvPr>
+          <p:cNvSpPr>
+            <a:spLocks xmlns:a="http://schemas.openxmlformats.org/drawingml/2006/main" noGrp="1"/>
+          </p:cNvSpPr>
+          <p:nvPr/>
+        </p:nvSpPr>
+        <p:spPr>
+          <a:xfrm xmlns:a="http://schemas.openxmlformats.org/drawingml/2006/main">
+            <a:off x="1714500" y="3524250"/>
+            <a:ext cx="9525000" cy="638175"/>
           </a:xfrm>
           <a:prstGeom xmlns:a="http://schemas.openxmlformats.org/drawingml/2006/main" prst="rect">
             <a:avLst/>
@@ -8671,7 +8677,7 @@
           <a:lstStyle xmlns:a="http://schemas.openxmlformats.org/drawingml/2006/main"/>
           <a:p xmlns:a="http://schemas.openxmlformats.org/drawingml/2006/main">
             <a:pPr algn="l">
-              <a:defRPr sz="1500" b="0">
+              <a:defRPr sz="1575" b="0">
                 <a:solidFill>
                   <a:srgbClr val="17253A"/>
                 </a:solidFill>
@@ -8681,7 +8687,7 @@
               </a:defRPr>
             </a:pPr>
             <a:r>
-              <a:rPr sz="1500" b="0">
+              <a:rPr sz="1575" b="0">
                 <a:solidFill>
                   <a:srgbClr val="17253A"/>
                 </a:solidFill>
@@ -8689,7 +8695,7 @@
                 <a:ea typeface="Arial"/>
                 <a:cs typeface="Arial"/>
               </a:rPr>
-              <a:t>Complete the calculation: 32.515.</a:t>
+              <a:t>1.000 - 0.485 = 0.515</a:t>
             </a:r>
           </a:p>
         </p:txBody>
@@ -8699,28 +8705,30 @@
           <p:cNvPr id="20" name="">
             <a:extLst xmlns:a="http://schemas.openxmlformats.org/drawingml/2006/main">
               <a:ext uri="{FF2B5EF4-FFF2-40B4-BE49-F238E27FC236}">
-                <a16:creationId xmlns:a16="http://schemas.microsoft.com/office/drawing/2014/main" id="{2C3A182E-F451-4D30-B381-A35EFCF0AB36}"/>
-              </a:ext>
-            </a:extLst>
-          </p:cNvPr>
-          <p:cNvSpPr>
-            <a:spLocks xmlns:a="http://schemas.openxmlformats.org/drawingml/2006/main" noGrp="1"/>
-          </p:cNvSpPr>
-          <p:nvPr/>
-        </p:nvSpPr>
-        <p:spPr>
-          <a:xfrm xmlns:a="http://schemas.openxmlformats.org/drawingml/2006/main">
-            <a:off x="1000125" y="4476750"/>
-            <a:ext cx="476250" cy="476250"/>
-          </a:xfrm>
-          <a:prstGeom xmlns:a="http://schemas.openxmlformats.org/drawingml/2006/main" prst="ellipse">
+                <a16:creationId xmlns:a16="http://schemas.microsoft.com/office/drawing/2014/main" id="{550235ED-38B1-4D7D-985E-F1BAA78E78FA}"/>
+              </a:ext>
+            </a:extLst>
+          </p:cNvPr>
+          <p:cNvSpPr>
+            <a:spLocks xmlns:a="http://schemas.openxmlformats.org/drawingml/2006/main" noGrp="1"/>
+          </p:cNvSpPr>
+          <p:nvPr/>
+        </p:nvSpPr>
+        <p:spPr>
+          <a:xfrm xmlns:a="http://schemas.openxmlformats.org/drawingml/2006/main">
+            <a:off x="1714500" y="4181475"/>
+            <a:ext cx="9334500" cy="9525"/>
+          </a:xfrm>
+          <a:prstGeom xmlns:a="http://schemas.openxmlformats.org/drawingml/2006/main" prst="rect">
             <a:avLst/>
           </a:prstGeom>
           <a:solidFill xmlns:a="http://schemas.openxmlformats.org/drawingml/2006/main">
-            <a:srgbClr val="2C6E73"/>
+            <a:srgbClr val="D9E0E6"/>
           </a:solidFill>
           <a:ln xmlns:a="http://schemas.openxmlformats.org/drawingml/2006/main" w="0">
-            <a:noFill/>
+            <a:solidFill>
+              <a:srgbClr val="D9E0E6"/>
+            </a:solidFill>
           </a:ln>
         </p:spPr>
       </p:sp>
@@ -8729,19 +8737,19 @@
           <p:cNvPr id="21" name="">
             <a:extLst xmlns:a="http://schemas.openxmlformats.org/drawingml/2006/main">
               <a:ext uri="{FF2B5EF4-FFF2-40B4-BE49-F238E27FC236}">
-                <a16:creationId xmlns:a16="http://schemas.microsoft.com/office/drawing/2014/main" id="{6883F283-5D69-4D36-AC61-FDB350903FA1}"/>
-              </a:ext>
-            </a:extLst>
-          </p:cNvPr>
-          <p:cNvSpPr>
-            <a:spLocks xmlns:a="http://schemas.openxmlformats.org/drawingml/2006/main" noGrp="1"/>
-          </p:cNvSpPr>
-          <p:nvPr/>
-        </p:nvSpPr>
-        <p:spPr>
-          <a:xfrm xmlns:a="http://schemas.openxmlformats.org/drawingml/2006/main">
-            <a:off x="1000125" y="4505325"/>
-            <a:ext cx="476250" cy="419100"/>
+                <a16:creationId xmlns:a16="http://schemas.microsoft.com/office/drawing/2014/main" id="{84161DAE-C5EE-4A4B-A1E9-418D6E4667BB}"/>
+              </a:ext>
+            </a:extLst>
+          </p:cNvPr>
+          <p:cNvSpPr>
+            <a:spLocks xmlns:a="http://schemas.openxmlformats.org/drawingml/2006/main" noGrp="1"/>
+          </p:cNvSpPr>
+          <p:nvPr/>
+        </p:nvSpPr>
+        <p:spPr>
+          <a:xfrm xmlns:a="http://schemas.openxmlformats.org/drawingml/2006/main">
+            <a:off x="1162050" y="4314825"/>
+            <a:ext cx="400050" cy="400050"/>
           </a:xfrm>
           <a:prstGeom xmlns:a="http://schemas.openxmlformats.org/drawingml/2006/main" prst="rect">
             <a:avLst/>
@@ -8758,9 +8766,9 @@
           <a:lstStyle xmlns:a="http://schemas.openxmlformats.org/drawingml/2006/main"/>
           <a:p xmlns:a="http://schemas.openxmlformats.org/drawingml/2006/main">
             <a:pPr algn="ctr">
-              <a:defRPr sz="1350" b="1">
-                <a:solidFill>
-                  <a:srgbClr val="FFFFFF"/>
+              <a:defRPr sz="1125" b="1">
+                <a:solidFill>
+                  <a:srgbClr val="2C6E73"/>
                 </a:solidFill>
                 <a:latin typeface="Arial"/>
                 <a:ea typeface="Arial"/>
@@ -8768,9 +8776,9 @@
               </a:defRPr>
             </a:pPr>
             <a:r>
-              <a:rPr sz="1350" b="1">
-                <a:solidFill>
-                  <a:srgbClr val="FFFFFF"/>
+              <a:rPr sz="1125" b="1">
+                <a:solidFill>
+                  <a:srgbClr val="2C6E73"/>
                 </a:solidFill>
                 <a:latin typeface="Arial"/>
                 <a:ea typeface="Arial"/>
@@ -8786,19 +8794,19 @@
           <p:cNvPr id="22" name="">
             <a:extLst xmlns:a="http://schemas.openxmlformats.org/drawingml/2006/main">
               <a:ext uri="{FF2B5EF4-FFF2-40B4-BE49-F238E27FC236}">
-                <a16:creationId xmlns:a16="http://schemas.microsoft.com/office/drawing/2014/main" id="{3B55D48C-C7D4-4CA5-8040-6C2C16148868}"/>
-              </a:ext>
-            </a:extLst>
-          </p:cNvPr>
-          <p:cNvSpPr>
-            <a:spLocks xmlns:a="http://schemas.openxmlformats.org/drawingml/2006/main" noGrp="1"/>
-          </p:cNvSpPr>
-          <p:nvPr/>
-        </p:nvSpPr>
-        <p:spPr>
-          <a:xfrm xmlns:a="http://schemas.openxmlformats.org/drawingml/2006/main">
-            <a:off x="1714500" y="4410075"/>
-            <a:ext cx="9429750" cy="609600"/>
+                <a16:creationId xmlns:a16="http://schemas.microsoft.com/office/drawing/2014/main" id="{E8DF9227-4C28-410C-A14D-B77767432360}"/>
+              </a:ext>
+            </a:extLst>
+          </p:cNvPr>
+          <p:cNvSpPr>
+            <a:spLocks xmlns:a="http://schemas.openxmlformats.org/drawingml/2006/main" noGrp="1"/>
+          </p:cNvSpPr>
+          <p:nvPr/>
+        </p:nvSpPr>
+        <p:spPr>
+          <a:xfrm xmlns:a="http://schemas.openxmlformats.org/drawingml/2006/main">
+            <a:off x="1714500" y="4229100"/>
+            <a:ext cx="9525000" cy="638175"/>
           </a:xfrm>
           <a:prstGeom xmlns:a="http://schemas.openxmlformats.org/drawingml/2006/main" prst="rect">
             <a:avLst/>
@@ -8815,9 +8823,9 @@
           <a:lstStyle xmlns:a="http://schemas.openxmlformats.org/drawingml/2006/main"/>
           <a:p xmlns:a="http://schemas.openxmlformats.org/drawingml/2006/main">
             <a:pPr algn="l">
-              <a:defRPr sz="1500" b="1">
-                <a:solidFill>
-                  <a:srgbClr val="2F785D"/>
+              <a:defRPr sz="1575" b="0">
+                <a:solidFill>
+                  <a:srgbClr val="17253A"/>
                 </a:solidFill>
                 <a:latin typeface="Arial"/>
                 <a:ea typeface="Arial"/>
@@ -8825,15 +8833,161 @@
               </a:defRPr>
             </a:pPr>
             <a:r>
-              <a:rPr sz="1500" b="1">
+              <a:rPr sz="1575" b="0">
+                <a:solidFill>
+                  <a:srgbClr val="17253A"/>
+                </a:solidFill>
+                <a:latin typeface="Arial"/>
+                <a:ea typeface="Arial"/>
+                <a:cs typeface="Arial"/>
+              </a:rPr>
+              <a:t>49 - 17 = 32</a:t>
+            </a:r>
+          </a:p>
+        </p:txBody>
+      </p:sp>
+      <p:sp>
+        <p:nvSpPr>
+          <p:cNvPr id="23" name="">
+            <a:extLst xmlns:a="http://schemas.openxmlformats.org/drawingml/2006/main">
+              <a:ext uri="{FF2B5EF4-FFF2-40B4-BE49-F238E27FC236}">
+                <a16:creationId xmlns:a16="http://schemas.microsoft.com/office/drawing/2014/main" id="{D17BAF26-2F7A-4F44-A283-7B806CB6A6E2}"/>
+              </a:ext>
+            </a:extLst>
+          </p:cNvPr>
+          <p:cNvSpPr>
+            <a:spLocks xmlns:a="http://schemas.openxmlformats.org/drawingml/2006/main" noGrp="1"/>
+          </p:cNvSpPr>
+          <p:nvPr/>
+        </p:nvSpPr>
+        <p:spPr>
+          <a:xfrm xmlns:a="http://schemas.openxmlformats.org/drawingml/2006/main">
+            <a:off x="1714500" y="4886325"/>
+            <a:ext cx="9334500" cy="9525"/>
+          </a:xfrm>
+          <a:prstGeom xmlns:a="http://schemas.openxmlformats.org/drawingml/2006/main" prst="rect">
+            <a:avLst/>
+          </a:prstGeom>
+          <a:solidFill xmlns:a="http://schemas.openxmlformats.org/drawingml/2006/main">
+            <a:srgbClr val="D9E0E6"/>
+          </a:solidFill>
+          <a:ln xmlns:a="http://schemas.openxmlformats.org/drawingml/2006/main" w="0">
+            <a:solidFill>
+              <a:srgbClr val="D9E0E6"/>
+            </a:solidFill>
+          </a:ln>
+        </p:spPr>
+      </p:sp>
+      <p:sp>
+        <p:nvSpPr>
+          <p:cNvPr id="24" name="">
+            <a:extLst xmlns:a="http://schemas.openxmlformats.org/drawingml/2006/main">
+              <a:ext uri="{FF2B5EF4-FFF2-40B4-BE49-F238E27FC236}">
+                <a16:creationId xmlns:a16="http://schemas.microsoft.com/office/drawing/2014/main" id="{BD2FD18D-D1CE-4B42-A16B-2CA0F2148D4D}"/>
+              </a:ext>
+            </a:extLst>
+          </p:cNvPr>
+          <p:cNvSpPr>
+            <a:spLocks xmlns:a="http://schemas.openxmlformats.org/drawingml/2006/main" noGrp="1"/>
+          </p:cNvSpPr>
+          <p:nvPr/>
+        </p:nvSpPr>
+        <p:spPr>
+          <a:xfrm xmlns:a="http://schemas.openxmlformats.org/drawingml/2006/main">
+            <a:off x="1162050" y="5019675"/>
+            <a:ext cx="400050" cy="400050"/>
+          </a:xfrm>
+          <a:prstGeom xmlns:a="http://schemas.openxmlformats.org/drawingml/2006/main" prst="rect">
+            <a:avLst/>
+          </a:prstGeom>
+          <a:noFill xmlns:a="http://schemas.openxmlformats.org/drawingml/2006/main"/>
+          <a:ln xmlns:a="http://schemas.openxmlformats.org/drawingml/2006/main" w="0">
+            <a:noFill/>
+          </a:ln>
+        </p:spPr>
+        <p:txBody>
+          <a:bodyPr xmlns:a="http://schemas.openxmlformats.org/drawingml/2006/main" anchor="ctr">
+            <a:normAutofit fontScale="100000"/>
+          </a:bodyPr>
+          <a:lstStyle xmlns:a="http://schemas.openxmlformats.org/drawingml/2006/main"/>
+          <a:p xmlns:a="http://schemas.openxmlformats.org/drawingml/2006/main">
+            <a:pPr algn="ctr">
+              <a:defRPr sz="1125" b="1">
                 <a:solidFill>
                   <a:srgbClr val="2F785D"/>
                 </a:solidFill>
                 <a:latin typeface="Arial"/>
                 <a:ea typeface="Arial"/>
                 <a:cs typeface="Arial"/>
+              </a:defRPr>
+            </a:pPr>
+            <a:r>
+              <a:rPr sz="1125" b="1">
+                <a:solidFill>
+                  <a:srgbClr val="2F785D"/>
+                </a:solidFill>
+                <a:latin typeface="Arial"/>
+                <a:ea typeface="Arial"/>
+                <a:cs typeface="Arial"/>
               </a:rPr>
-              <a:t>Check the result: Estimate and check that the decimal point is reasonable.</a:t>
+              <a:t>5</a:t>
+            </a:r>
+          </a:p>
+        </p:txBody>
+      </p:sp>
+      <p:sp>
+        <p:nvSpPr>
+          <p:cNvPr id="25" name="">
+            <a:extLst xmlns:a="http://schemas.openxmlformats.org/drawingml/2006/main">
+              <a:ext uri="{FF2B5EF4-FFF2-40B4-BE49-F238E27FC236}">
+                <a16:creationId xmlns:a16="http://schemas.microsoft.com/office/drawing/2014/main" id="{97F5AD15-24EC-4E2D-88EF-3F4E20C86C9E}"/>
+              </a:ext>
+            </a:extLst>
+          </p:cNvPr>
+          <p:cNvSpPr>
+            <a:spLocks xmlns:a="http://schemas.openxmlformats.org/drawingml/2006/main" noGrp="1"/>
+          </p:cNvSpPr>
+          <p:nvPr/>
+        </p:nvSpPr>
+        <p:spPr>
+          <a:xfrm xmlns:a="http://schemas.openxmlformats.org/drawingml/2006/main">
+            <a:off x="1714500" y="4933950"/>
+            <a:ext cx="9525000" cy="638175"/>
+          </a:xfrm>
+          <a:prstGeom xmlns:a="http://schemas.openxmlformats.org/drawingml/2006/main" prst="rect">
+            <a:avLst/>
+          </a:prstGeom>
+          <a:noFill xmlns:a="http://schemas.openxmlformats.org/drawingml/2006/main"/>
+          <a:ln xmlns:a="http://schemas.openxmlformats.org/drawingml/2006/main" w="0">
+            <a:noFill/>
+          </a:ln>
+        </p:spPr>
+        <p:txBody>
+          <a:bodyPr xmlns:a="http://schemas.openxmlformats.org/drawingml/2006/main" anchor="ctr">
+            <a:normAutofit fontScale="100000"/>
+          </a:bodyPr>
+          <a:lstStyle xmlns:a="http://schemas.openxmlformats.org/drawingml/2006/main"/>
+          <a:p xmlns:a="http://schemas.openxmlformats.org/drawingml/2006/main">
+            <a:pPr algn="l">
+              <a:defRPr sz="1575" b="1">
+                <a:solidFill>
+                  <a:srgbClr val="2F785D"/>
+                </a:solidFill>
+                <a:latin typeface="Arial"/>
+                <a:ea typeface="Arial"/>
+                <a:cs typeface="Arial"/>
+              </a:defRPr>
+            </a:pPr>
+            <a:r>
+              <a:rPr sz="1575" b="1">
+                <a:solidFill>
+                  <a:srgbClr val="2F785D"/>
+                </a:solidFill>
+                <a:latin typeface="Arial"/>
+                <a:ea typeface="Arial"/>
+                <a:cs typeface="Arial"/>
+              </a:rPr>
+              <a:t>32 + 0.515 = 32.515</a:t>
             </a:r>
           </a:p>
         </p:txBody>
@@ -8841,7 +8995,7 @@
     </p:spTree>
     <p:extLst>
       <p:ext uri="{BB962C8B-B14F-4D97-AF65-F5344CB8AC3E}">
-        <p14:creationId xmlns:p14="http://schemas.microsoft.com/office/powerpoint/2010/main" val="1783626463"/>
+        <p14:creationId xmlns:p14="http://schemas.microsoft.com/office/powerpoint/2010/main" val="1829108066"/>
       </p:ext>
     </p:extLst>
   </p:cSld>
@@ -9078,6 +9232,51 @@
                       </p:childTnLst>
                     </p:cTn>
                   </p:par>
+                  <p:par>
+                    <p:cTn id="23" fill="hold">
+                      <p:stCondLst>
+                        <p:cond delay="indefinite"/>
+                      </p:stCondLst>
+                      <p:childTnLst>
+                        <p:par>
+                          <p:cTn id="24" fill="hold">
+                            <p:stCondLst>
+                              <p:cond delay="0"/>
+                            </p:stCondLst>
+                            <p:childTnLst>
+                              <p:par>
+                                <p:cTn id="25" presetID="1" presetClass="entr" presetSubtype="0" fill="hold" grpId="0" nodeType="clickEffect">
+                                  <p:stCondLst>
+                                    <p:cond delay="0"/>
+                                  </p:stCondLst>
+                                  <p:childTnLst>
+                                    <p:set>
+                                      <p:cBhvr>
+                                        <p:cTn id="26" dur="1" fill="hold">
+                                          <p:stCondLst>
+                                            <p:cond delay="0"/>
+                                          </p:stCondLst>
+                                        </p:cTn>
+                                        <p:tgtEl>
+                                          <p:spTgt spid="25"/>
+                                        </p:tgtEl>
+                                        <p:attrNameLst>
+                                          <p:attrName>style.visibility</p:attrName>
+                                        </p:attrNameLst>
+                                      </p:cBhvr>
+                                      <p:to>
+                                        <p:strVal val="visible"/>
+                                      </p:to>
+                                    </p:set>
+                                  </p:childTnLst>
+                                </p:cTn>
+                              </p:par>
+                            </p:childTnLst>
+                          </p:cTn>
+                        </p:par>
+                      </p:childTnLst>
+                    </p:cTn>
+                  </p:par>
                 </p:childTnLst>
               </p:cTn>
               <p:prevCondLst>
@@ -9105,6 +9304,7 @@
       <p:bldP spid="16" grpId="0"/>
       <p:bldP spid="19" grpId="0"/>
       <p:bldP spid="22" grpId="0"/>
+      <p:bldP spid="25" grpId="0"/>
     </p:bldLst>
   </p:timing>
 </p:sld>
@@ -9134,7 +9334,7 @@
           <p:cNvPr id="15" name="">
             <a:extLst xmlns:a="http://schemas.openxmlformats.org/drawingml/2006/main">
               <a:ext uri="{FF2B5EF4-FFF2-40B4-BE49-F238E27FC236}">
-                <a16:creationId xmlns:a16="http://schemas.microsoft.com/office/drawing/2014/main" id="{035EC37B-5CA3-409F-A2F7-1519F1A7F824}"/>
+                <a16:creationId xmlns:a16="http://schemas.microsoft.com/office/drawing/2014/main" id="{981BD27C-5EF5-4CA4-9821-C2A350C0EFEC}"/>
               </a:ext>
             </a:extLst>
           </p:cNvPr>
@@ -9166,7 +9366,7 @@
           <p:cNvPr id="2" name="">
             <a:extLst xmlns:a="http://schemas.openxmlformats.org/drawingml/2006/main">
               <a:ext uri="{FF2B5EF4-FFF2-40B4-BE49-F238E27FC236}">
-                <a16:creationId xmlns:a16="http://schemas.microsoft.com/office/drawing/2014/main" id="{98211ABB-9A9F-42C3-8B0D-C55E7C98775D}"/>
+                <a16:creationId xmlns:a16="http://schemas.microsoft.com/office/drawing/2014/main" id="{CB7C20E5-9988-480A-AB24-77DB1929E786}"/>
               </a:ext>
             </a:extLst>
           </p:cNvPr>
@@ -9223,7 +9423,7 @@
           <p:cNvPr id="3" name="">
             <a:extLst xmlns:a="http://schemas.openxmlformats.org/drawingml/2006/main">
               <a:ext uri="{FF2B5EF4-FFF2-40B4-BE49-F238E27FC236}">
-                <a16:creationId xmlns:a16="http://schemas.microsoft.com/office/drawing/2014/main" id="{150DA54B-97D3-4776-B861-7103C472230B}"/>
+                <a16:creationId xmlns:a16="http://schemas.microsoft.com/office/drawing/2014/main" id="{CFC715DC-C9E1-4DBF-B4CD-AA8187716652}"/>
               </a:ext>
             </a:extLst>
           </p:cNvPr>
@@ -9255,7 +9455,7 @@
           <p:cNvPr id="4" name="">
             <a:extLst xmlns:a="http://schemas.openxmlformats.org/drawingml/2006/main">
               <a:ext uri="{FF2B5EF4-FFF2-40B4-BE49-F238E27FC236}">
-                <a16:creationId xmlns:a16="http://schemas.microsoft.com/office/drawing/2014/main" id="{0ED81CA9-C781-4713-B80C-9D9B8AFAEE2D}"/>
+                <a16:creationId xmlns:a16="http://schemas.microsoft.com/office/drawing/2014/main" id="{6DAE40E7-FF23-4BF8-98DA-1F9A35EE4F31}"/>
               </a:ext>
             </a:extLst>
           </p:cNvPr>
@@ -9312,7 +9512,7 @@
           <p:cNvPr id="5" name="">
             <a:extLst xmlns:a="http://schemas.openxmlformats.org/drawingml/2006/main">
               <a:ext uri="{FF2B5EF4-FFF2-40B4-BE49-F238E27FC236}">
-                <a16:creationId xmlns:a16="http://schemas.microsoft.com/office/drawing/2014/main" id="{6B41C562-35B7-404C-98B7-7789139F8F86}"/>
+                <a16:creationId xmlns:a16="http://schemas.microsoft.com/office/drawing/2014/main" id="{30178C20-7D90-43A1-B979-6CA3D15CF113}"/>
               </a:ext>
             </a:extLst>
           </p:cNvPr>
@@ -9369,7 +9569,7 @@
           <p:cNvPr id="6" name="">
             <a:extLst xmlns:a="http://schemas.openxmlformats.org/drawingml/2006/main">
               <a:ext uri="{FF2B5EF4-FFF2-40B4-BE49-F238E27FC236}">
-                <a16:creationId xmlns:a16="http://schemas.microsoft.com/office/drawing/2014/main" id="{059459F0-2845-4845-8EF6-614710F879CF}"/>
+                <a16:creationId xmlns:a16="http://schemas.microsoft.com/office/drawing/2014/main" id="{EBC785D3-BC53-4468-820E-B456B3C371F7}"/>
               </a:ext>
             </a:extLst>
           </p:cNvPr>
@@ -9426,7 +9626,7 @@
           <p:cNvPr id="7" name="">
             <a:extLst xmlns:a="http://schemas.openxmlformats.org/drawingml/2006/main">
               <a:ext uri="{FF2B5EF4-FFF2-40B4-BE49-F238E27FC236}">
-                <a16:creationId xmlns:a16="http://schemas.microsoft.com/office/drawing/2014/main" id="{3C56C6FE-CC08-4438-8E8E-9DBD83D54816}"/>
+                <a16:creationId xmlns:a16="http://schemas.microsoft.com/office/drawing/2014/main" id="{B05D13D1-5106-47E4-A9D1-459A443E3CD5}"/>
               </a:ext>
             </a:extLst>
           </p:cNvPr>
@@ -9458,7 +9658,7 @@
           <p:cNvPr id="8" name="">
             <a:extLst xmlns:a="http://schemas.openxmlformats.org/drawingml/2006/main">
               <a:ext uri="{FF2B5EF4-FFF2-40B4-BE49-F238E27FC236}">
-                <a16:creationId xmlns:a16="http://schemas.microsoft.com/office/drawing/2014/main" id="{0A3BF126-8977-4407-B190-58459A3F2E64}"/>
+                <a16:creationId xmlns:a16="http://schemas.microsoft.com/office/drawing/2014/main" id="{CDBDCF68-A25E-45A0-95BF-9DE2293A2AAC}"/>
               </a:ext>
             </a:extLst>
           </p:cNvPr>
@@ -9515,7 +9715,7 @@
           <p:cNvPr id="9" name="">
             <a:extLst xmlns:a="http://schemas.openxmlformats.org/drawingml/2006/main">
               <a:ext uri="{FF2B5EF4-FFF2-40B4-BE49-F238E27FC236}">
-                <a16:creationId xmlns:a16="http://schemas.microsoft.com/office/drawing/2014/main" id="{AC47C593-90E7-4856-95A0-A5AD5E45602C}"/>
+                <a16:creationId xmlns:a16="http://schemas.microsoft.com/office/drawing/2014/main" id="{402C3E5C-AA31-4911-8DDA-B6D502110959}"/>
               </a:ext>
             </a:extLst>
           </p:cNvPr>
@@ -9572,7 +9772,7 @@
           <p:cNvPr id="10" name="">
             <a:extLst xmlns:a="http://schemas.openxmlformats.org/drawingml/2006/main">
               <a:ext uri="{FF2B5EF4-FFF2-40B4-BE49-F238E27FC236}">
-                <a16:creationId xmlns:a16="http://schemas.microsoft.com/office/drawing/2014/main" id="{80431BE6-AB71-4FCA-A2C0-4154E012D9A8}"/>
+                <a16:creationId xmlns:a16="http://schemas.microsoft.com/office/drawing/2014/main" id="{4BAF94E5-8A84-477F-A0D6-4C5EA29F5964}"/>
               </a:ext>
             </a:extLst>
           </p:cNvPr>
@@ -9629,7 +9829,7 @@
           <p:cNvPr id="11" name="">
             <a:extLst xmlns:a="http://schemas.openxmlformats.org/drawingml/2006/main">
               <a:ext uri="{FF2B5EF4-FFF2-40B4-BE49-F238E27FC236}">
-                <a16:creationId xmlns:a16="http://schemas.microsoft.com/office/drawing/2014/main" id="{E721B3B0-9A5C-4168-9621-AEE27D384724}"/>
+                <a16:creationId xmlns:a16="http://schemas.microsoft.com/office/drawing/2014/main" id="{CD9E831E-B5B5-4736-AF7A-9B1D79ED028F}"/>
               </a:ext>
             </a:extLst>
           </p:cNvPr>
@@ -9686,7 +9886,7 @@
           <p:cNvPr id="12" name="">
             <a:extLst xmlns:a="http://schemas.openxmlformats.org/drawingml/2006/main">
               <a:ext uri="{FF2B5EF4-FFF2-40B4-BE49-F238E27FC236}">
-                <a16:creationId xmlns:a16="http://schemas.microsoft.com/office/drawing/2014/main" id="{AC0E271F-9E4B-4CAC-88AD-5815FFF6EBDE}"/>
+                <a16:creationId xmlns:a16="http://schemas.microsoft.com/office/drawing/2014/main" id="{D351F1F1-A1E0-4610-960E-65AC8F5927C9}"/>
               </a:ext>
             </a:extLst>
           </p:cNvPr>
@@ -9718,7 +9918,7 @@
           <p:cNvPr id="13" name="">
             <a:extLst xmlns:a="http://schemas.openxmlformats.org/drawingml/2006/main">
               <a:ext uri="{FF2B5EF4-FFF2-40B4-BE49-F238E27FC236}">
-                <a16:creationId xmlns:a16="http://schemas.microsoft.com/office/drawing/2014/main" id="{17A45A34-7C28-4BE2-A542-9F3B18EE98F7}"/>
+                <a16:creationId xmlns:a16="http://schemas.microsoft.com/office/drawing/2014/main" id="{B5B8E467-1E7C-4161-AD83-549ACA4C54AE}"/>
               </a:ext>
             </a:extLst>
           </p:cNvPr>
@@ -9775,7 +9975,7 @@
           <p:cNvPr id="14" name="">
             <a:extLst xmlns:a="http://schemas.openxmlformats.org/drawingml/2006/main">
               <a:ext uri="{FF2B5EF4-FFF2-40B4-BE49-F238E27FC236}">
-                <a16:creationId xmlns:a16="http://schemas.microsoft.com/office/drawing/2014/main" id="{DFE012BD-D05C-45FA-B871-8A231CBA0C97}"/>
+                <a16:creationId xmlns:a16="http://schemas.microsoft.com/office/drawing/2014/main" id="{28190898-2862-42A7-9AB3-F93729709ECA}"/>
               </a:ext>
             </a:extLst>
           </p:cNvPr>
@@ -9830,7 +10030,7 @@
     </p:spTree>
     <p:extLst>
       <p:ext uri="{BB962C8B-B14F-4D97-AF65-F5344CB8AC3E}">
-        <p14:creationId xmlns:p14="http://schemas.microsoft.com/office/powerpoint/2010/main" val="355549409"/>
+        <p14:creationId xmlns:p14="http://schemas.microsoft.com/office/powerpoint/2010/main" val="455006681"/>
       </p:ext>
     </p:extLst>
   </p:cSld>
@@ -10031,7 +10231,7 @@
           <p:cNvPr id="16" name="">
             <a:extLst xmlns:a="http://schemas.openxmlformats.org/drawingml/2006/main">
               <a:ext uri="{FF2B5EF4-FFF2-40B4-BE49-F238E27FC236}">
-                <a16:creationId xmlns:a16="http://schemas.microsoft.com/office/drawing/2014/main" id="{708D45D2-071E-49B2-B788-747BF107363B}"/>
+                <a16:creationId xmlns:a16="http://schemas.microsoft.com/office/drawing/2014/main" id="{4AD5D28F-E3F4-4F5F-9C4B-A403A9B3F413}"/>
               </a:ext>
             </a:extLst>
           </p:cNvPr>
@@ -10063,7 +10263,7 @@
           <p:cNvPr id="2" name="">
             <a:extLst xmlns:a="http://schemas.openxmlformats.org/drawingml/2006/main">
               <a:ext uri="{FF2B5EF4-FFF2-40B4-BE49-F238E27FC236}">
-                <a16:creationId xmlns:a16="http://schemas.microsoft.com/office/drawing/2014/main" id="{408FE474-5877-40D2-9861-8E29C67564FD}"/>
+                <a16:creationId xmlns:a16="http://schemas.microsoft.com/office/drawing/2014/main" id="{000C2000-8DED-49E0-BB18-5BD96090EC3D}"/>
               </a:ext>
             </a:extLst>
           </p:cNvPr>
@@ -10120,7 +10320,7 @@
           <p:cNvPr id="3" name="">
             <a:extLst xmlns:a="http://schemas.openxmlformats.org/drawingml/2006/main">
               <a:ext uri="{FF2B5EF4-FFF2-40B4-BE49-F238E27FC236}">
-                <a16:creationId xmlns:a16="http://schemas.microsoft.com/office/drawing/2014/main" id="{CA3B5218-BD94-4EDD-A264-52FC19AF094A}"/>
+                <a16:creationId xmlns:a16="http://schemas.microsoft.com/office/drawing/2014/main" id="{88A2AA2E-2F39-4E07-BB50-AED3F5C68C03}"/>
               </a:ext>
             </a:extLst>
           </p:cNvPr>
@@ -10152,7 +10352,7 @@
           <p:cNvPr id="4" name="">
             <a:extLst xmlns:a="http://schemas.openxmlformats.org/drawingml/2006/main">
               <a:ext uri="{FF2B5EF4-FFF2-40B4-BE49-F238E27FC236}">
-                <a16:creationId xmlns:a16="http://schemas.microsoft.com/office/drawing/2014/main" id="{861C39AA-D3D0-4D69-B126-69ADAF701E71}"/>
+                <a16:creationId xmlns:a16="http://schemas.microsoft.com/office/drawing/2014/main" id="{AD73D107-795F-48A1-88EC-BA34E7D79683}"/>
               </a:ext>
             </a:extLst>
           </p:cNvPr>
@@ -10209,7 +10409,7 @@
           <p:cNvPr id="5" name="">
             <a:extLst xmlns:a="http://schemas.openxmlformats.org/drawingml/2006/main">
               <a:ext uri="{FF2B5EF4-FFF2-40B4-BE49-F238E27FC236}">
-                <a16:creationId xmlns:a16="http://schemas.microsoft.com/office/drawing/2014/main" id="{94E13BC0-03CB-4C21-B158-49005BBA8FAE}"/>
+                <a16:creationId xmlns:a16="http://schemas.microsoft.com/office/drawing/2014/main" id="{EB2D0C49-9971-4F2E-B665-8C3F553EB6DF}"/>
               </a:ext>
             </a:extLst>
           </p:cNvPr>
@@ -10266,7 +10466,7 @@
           <p:cNvPr id="6" name="">
             <a:extLst xmlns:a="http://schemas.openxmlformats.org/drawingml/2006/main">
               <a:ext uri="{FF2B5EF4-FFF2-40B4-BE49-F238E27FC236}">
-                <a16:creationId xmlns:a16="http://schemas.microsoft.com/office/drawing/2014/main" id="{4629C298-568E-4F9B-A7DB-9F443FE18112}"/>
+                <a16:creationId xmlns:a16="http://schemas.microsoft.com/office/drawing/2014/main" id="{EDC4D811-0ED8-42CB-8F4C-020F93231157}"/>
               </a:ext>
             </a:extLst>
           </p:cNvPr>
@@ -10323,7 +10523,7 @@
           <p:cNvPr id="7" name="">
             <a:extLst xmlns:a="http://schemas.openxmlformats.org/drawingml/2006/main">
               <a:ext uri="{FF2B5EF4-FFF2-40B4-BE49-F238E27FC236}">
-                <a16:creationId xmlns:a16="http://schemas.microsoft.com/office/drawing/2014/main" id="{77BAB2DF-4A44-46C4-8FE2-68F236EF7D8C}"/>
+                <a16:creationId xmlns:a16="http://schemas.microsoft.com/office/drawing/2014/main" id="{0A7141C4-4741-4821-A3DB-5468F48E9F80}"/>
               </a:ext>
             </a:extLst>
           </p:cNvPr>
@@ -10355,7 +10555,7 @@
           <p:cNvPr id="8" name="">
             <a:extLst xmlns:a="http://schemas.openxmlformats.org/drawingml/2006/main">
               <a:ext uri="{FF2B5EF4-FFF2-40B4-BE49-F238E27FC236}">
-                <a16:creationId xmlns:a16="http://schemas.microsoft.com/office/drawing/2014/main" id="{A4DDE5B6-637D-4749-BD4F-1E09BFD503F4}"/>
+                <a16:creationId xmlns:a16="http://schemas.microsoft.com/office/drawing/2014/main" id="{E7184C05-6A4B-4E93-99DF-1AF761671365}"/>
               </a:ext>
             </a:extLst>
           </p:cNvPr>
@@ -10412,7 +10612,7 @@
           <p:cNvPr id="9" name="">
             <a:extLst xmlns:a="http://schemas.openxmlformats.org/drawingml/2006/main">
               <a:ext uri="{FF2B5EF4-FFF2-40B4-BE49-F238E27FC236}">
-                <a16:creationId xmlns:a16="http://schemas.microsoft.com/office/drawing/2014/main" id="{3F339729-150B-44D9-BABA-677773CA019E}"/>
+                <a16:creationId xmlns:a16="http://schemas.microsoft.com/office/drawing/2014/main" id="{FF3F3E5C-A0B4-4185-8DE5-2800BDB09BE8}"/>
               </a:ext>
             </a:extLst>
           </p:cNvPr>
@@ -10469,7 +10669,7 @@
           <p:cNvPr id="10" name="">
             <a:extLst xmlns:a="http://schemas.openxmlformats.org/drawingml/2006/main">
               <a:ext uri="{FF2B5EF4-FFF2-40B4-BE49-F238E27FC236}">
-                <a16:creationId xmlns:a16="http://schemas.microsoft.com/office/drawing/2014/main" id="{97520F8F-4E16-4751-BA97-CF2085EB6293}"/>
+                <a16:creationId xmlns:a16="http://schemas.microsoft.com/office/drawing/2014/main" id="{7E1FC005-20BC-4669-98CB-26889D040EF7}"/>
               </a:ext>
             </a:extLst>
           </p:cNvPr>
@@ -10526,7 +10726,7 @@
           <p:cNvPr id="11" name="">
             <a:extLst xmlns:a="http://schemas.openxmlformats.org/drawingml/2006/main">
               <a:ext uri="{FF2B5EF4-FFF2-40B4-BE49-F238E27FC236}">
-                <a16:creationId xmlns:a16="http://schemas.microsoft.com/office/drawing/2014/main" id="{49450F41-777B-4B4D-8FE1-E9793199321C}"/>
+                <a16:creationId xmlns:a16="http://schemas.microsoft.com/office/drawing/2014/main" id="{FAFD8A4A-3200-42E8-98F9-23399BF56CA3}"/>
               </a:ext>
             </a:extLst>
           </p:cNvPr>
@@ -10583,7 +10783,7 @@
           <p:cNvPr id="12" name="">
             <a:extLst xmlns:a="http://schemas.openxmlformats.org/drawingml/2006/main">
               <a:ext uri="{FF2B5EF4-FFF2-40B4-BE49-F238E27FC236}">
-                <a16:creationId xmlns:a16="http://schemas.microsoft.com/office/drawing/2014/main" id="{7320B954-9A2F-40AC-B5DF-1B40C28603C8}"/>
+                <a16:creationId xmlns:a16="http://schemas.microsoft.com/office/drawing/2014/main" id="{08E5FC97-F98D-4C88-B2C5-ADCCE9BE267C}"/>
               </a:ext>
             </a:extLst>
           </p:cNvPr>
@@ -10640,7 +10840,7 @@
           <p:cNvPr id="13" name="">
             <a:extLst xmlns:a="http://schemas.openxmlformats.org/drawingml/2006/main">
               <a:ext uri="{FF2B5EF4-FFF2-40B4-BE49-F238E27FC236}">
-                <a16:creationId xmlns:a16="http://schemas.microsoft.com/office/drawing/2014/main" id="{7531016E-62C8-4908-B048-1D0CE5836733}"/>
+                <a16:creationId xmlns:a16="http://schemas.microsoft.com/office/drawing/2014/main" id="{D6CC186F-B4EA-4E47-8003-A4F5150678CC}"/>
               </a:ext>
             </a:extLst>
           </p:cNvPr>
@@ -10697,7 +10897,7 @@
           <p:cNvPr id="14" name="">
             <a:extLst xmlns:a="http://schemas.openxmlformats.org/drawingml/2006/main">
               <a:ext uri="{FF2B5EF4-FFF2-40B4-BE49-F238E27FC236}">
-                <a16:creationId xmlns:a16="http://schemas.microsoft.com/office/drawing/2014/main" id="{4C4BAC8F-D95A-4100-8F6C-BF54F0DD7345}"/>
+                <a16:creationId xmlns:a16="http://schemas.microsoft.com/office/drawing/2014/main" id="{A8F6F300-90CF-4779-8D64-2744AFEA2B4F}"/>
               </a:ext>
             </a:extLst>
           </p:cNvPr>
@@ -10754,7 +10954,7 @@
           <p:cNvPr id="15" name="">
             <a:extLst xmlns:a="http://schemas.openxmlformats.org/drawingml/2006/main">
               <a:ext uri="{FF2B5EF4-FFF2-40B4-BE49-F238E27FC236}">
-                <a16:creationId xmlns:a16="http://schemas.microsoft.com/office/drawing/2014/main" id="{EA3DD604-5497-4A2A-A02B-5452B2E8805F}"/>
+                <a16:creationId xmlns:a16="http://schemas.microsoft.com/office/drawing/2014/main" id="{98D12A03-483A-4964-BD9C-D3DDED87E6E7}"/>
               </a:ext>
             </a:extLst>
           </p:cNvPr>
@@ -10809,7 +11009,7 @@
     </p:spTree>
     <p:extLst>
       <p:ext uri="{BB962C8B-B14F-4D97-AF65-F5344CB8AC3E}">
-        <p14:creationId xmlns:p14="http://schemas.microsoft.com/office/powerpoint/2010/main" val="1336753761"/>
+        <p14:creationId xmlns:p14="http://schemas.microsoft.com/office/powerpoint/2010/main" val="1077769579"/>
       </p:ext>
     </p:extLst>
   </p:cSld>
@@ -10964,7 +11164,7 @@
           <p:cNvPr id="16" name="">
             <a:extLst xmlns:a="http://schemas.openxmlformats.org/drawingml/2006/main">
               <a:ext uri="{FF2B5EF4-FFF2-40B4-BE49-F238E27FC236}">
-                <a16:creationId xmlns:a16="http://schemas.microsoft.com/office/drawing/2014/main" id="{3506B36E-1FB7-40C2-8DD8-3B907D1F2CA0}"/>
+                <a16:creationId xmlns:a16="http://schemas.microsoft.com/office/drawing/2014/main" id="{4A876A1C-89DF-4463-ABA7-98FA3D5383D1}"/>
               </a:ext>
             </a:extLst>
           </p:cNvPr>
@@ -10996,7 +11196,7 @@
           <p:cNvPr id="2" name="">
             <a:extLst xmlns:a="http://schemas.openxmlformats.org/drawingml/2006/main">
               <a:ext uri="{FF2B5EF4-FFF2-40B4-BE49-F238E27FC236}">
-                <a16:creationId xmlns:a16="http://schemas.microsoft.com/office/drawing/2014/main" id="{5FA491E1-7801-4932-A461-219A4FEFC14F}"/>
+                <a16:creationId xmlns:a16="http://schemas.microsoft.com/office/drawing/2014/main" id="{EE90970C-BAF6-441A-8245-5B96F1CD3F9D}"/>
               </a:ext>
             </a:extLst>
           </p:cNvPr>
@@ -11053,7 +11253,7 @@
           <p:cNvPr id="3" name="">
             <a:extLst xmlns:a="http://schemas.openxmlformats.org/drawingml/2006/main">
               <a:ext uri="{FF2B5EF4-FFF2-40B4-BE49-F238E27FC236}">
-                <a16:creationId xmlns:a16="http://schemas.microsoft.com/office/drawing/2014/main" id="{6E657EE8-F734-4F01-A110-917D450D696E}"/>
+                <a16:creationId xmlns:a16="http://schemas.microsoft.com/office/drawing/2014/main" id="{44C43BCF-9E7A-47CB-8E12-336A09ACF79C}"/>
               </a:ext>
             </a:extLst>
           </p:cNvPr>
@@ -11085,7 +11285,7 @@
           <p:cNvPr id="4" name="">
             <a:extLst xmlns:a="http://schemas.openxmlformats.org/drawingml/2006/main">
               <a:ext uri="{FF2B5EF4-FFF2-40B4-BE49-F238E27FC236}">
-                <a16:creationId xmlns:a16="http://schemas.microsoft.com/office/drawing/2014/main" id="{F41F1EBC-337D-4EC7-83CB-5797CDB75064}"/>
+                <a16:creationId xmlns:a16="http://schemas.microsoft.com/office/drawing/2014/main" id="{426D6203-72D9-4F6F-9DC2-407662B2309E}"/>
               </a:ext>
             </a:extLst>
           </p:cNvPr>
@@ -11142,7 +11342,7 @@
           <p:cNvPr id="5" name="">
             <a:extLst xmlns:a="http://schemas.openxmlformats.org/drawingml/2006/main">
               <a:ext uri="{FF2B5EF4-FFF2-40B4-BE49-F238E27FC236}">
-                <a16:creationId xmlns:a16="http://schemas.microsoft.com/office/drawing/2014/main" id="{F0386476-133E-4975-A934-5F8FE0BAB8E1}"/>
+                <a16:creationId xmlns:a16="http://schemas.microsoft.com/office/drawing/2014/main" id="{85294640-84D6-4367-A889-CEE4100A531D}"/>
               </a:ext>
             </a:extLst>
           </p:cNvPr>
@@ -11199,7 +11399,7 @@
           <p:cNvPr id="6" name="">
             <a:extLst xmlns:a="http://schemas.openxmlformats.org/drawingml/2006/main">
               <a:ext uri="{FF2B5EF4-FFF2-40B4-BE49-F238E27FC236}">
-                <a16:creationId xmlns:a16="http://schemas.microsoft.com/office/drawing/2014/main" id="{1220587C-DB10-4975-9D71-283772FEFA5E}"/>
+                <a16:creationId xmlns:a16="http://schemas.microsoft.com/office/drawing/2014/main" id="{ECEF5DE1-6238-4F60-AE86-8D76746A0D82}"/>
               </a:ext>
             </a:extLst>
           </p:cNvPr>
@@ -11256,7 +11456,7 @@
           <p:cNvPr id="7" name="">
             <a:extLst xmlns:a="http://schemas.openxmlformats.org/drawingml/2006/main">
               <a:ext uri="{FF2B5EF4-FFF2-40B4-BE49-F238E27FC236}">
-                <a16:creationId xmlns:a16="http://schemas.microsoft.com/office/drawing/2014/main" id="{FBA89D3F-098D-43C5-94B2-4CC11AD28B65}"/>
+                <a16:creationId xmlns:a16="http://schemas.microsoft.com/office/drawing/2014/main" id="{76C0F518-FDE8-4052-B965-BFBE39D434A0}"/>
               </a:ext>
             </a:extLst>
           </p:cNvPr>
@@ -11288,7 +11488,7 @@
           <p:cNvPr id="8" name="">
             <a:extLst xmlns:a="http://schemas.openxmlformats.org/drawingml/2006/main">
               <a:ext uri="{FF2B5EF4-FFF2-40B4-BE49-F238E27FC236}">
-                <a16:creationId xmlns:a16="http://schemas.microsoft.com/office/drawing/2014/main" id="{937564E9-9166-41DD-961F-E5EC06E60790}"/>
+                <a16:creationId xmlns:a16="http://schemas.microsoft.com/office/drawing/2014/main" id="{49F2CBA5-B8D7-496A-9D81-8D6DBE6BF688}"/>
               </a:ext>
             </a:extLst>
           </p:cNvPr>
@@ -11345,7 +11545,7 @@
           <p:cNvPr id="9" name="">
             <a:extLst xmlns:a="http://schemas.openxmlformats.org/drawingml/2006/main">
               <a:ext uri="{FF2B5EF4-FFF2-40B4-BE49-F238E27FC236}">
-                <a16:creationId xmlns:a16="http://schemas.microsoft.com/office/drawing/2014/main" id="{2CB4CA6C-74D1-48FC-AD92-98BE0BFCE08A}"/>
+                <a16:creationId xmlns:a16="http://schemas.microsoft.com/office/drawing/2014/main" id="{CDFDF8B1-AB25-4BBA-AD96-29CE330A68FE}"/>
               </a:ext>
             </a:extLst>
           </p:cNvPr>
@@ -11406,7 +11606,7 @@
           <p:nvPr/>
         </p:nvPicPr>
         <p:blipFill>
-          <a:blip xmlns:r="http://schemas.openxmlformats.org/officeDocument/2006/relationships" xmlns:a="http://schemas.openxmlformats.org/drawingml/2006/main" r:embed="Rc104c9e8b3cb4a60"/>
+          <a:blip xmlns:r="http://schemas.openxmlformats.org/officeDocument/2006/relationships" xmlns:a="http://schemas.openxmlformats.org/drawingml/2006/main" r:embed="Raa302b48eda647a7"/>
           <a:stretch xmlns:a="http://schemas.openxmlformats.org/drawingml/2006/main"/>
         </p:blipFill>
         <p:spPr>
@@ -11424,7 +11624,7 @@
           <p:cNvPr id="11" name="">
             <a:extLst xmlns:a="http://schemas.openxmlformats.org/drawingml/2006/main">
               <a:ext uri="{FF2B5EF4-FFF2-40B4-BE49-F238E27FC236}">
-                <a16:creationId xmlns:a16="http://schemas.microsoft.com/office/drawing/2014/main" id="{FA320C78-40E7-4C49-87AB-1EBC5F64E4E5}"/>
+                <a16:creationId xmlns:a16="http://schemas.microsoft.com/office/drawing/2014/main" id="{BB7EED2E-776E-4D96-8155-811274491D9D}"/>
               </a:ext>
             </a:extLst>
           </p:cNvPr>
@@ -11481,7 +11681,7 @@
           <p:cNvPr id="12" name="">
             <a:extLst xmlns:a="http://schemas.openxmlformats.org/drawingml/2006/main">
               <a:ext uri="{FF2B5EF4-FFF2-40B4-BE49-F238E27FC236}">
-                <a16:creationId xmlns:a16="http://schemas.microsoft.com/office/drawing/2014/main" id="{4E910EA9-5E9C-45D2-B386-016313D503EF}"/>
+                <a16:creationId xmlns:a16="http://schemas.microsoft.com/office/drawing/2014/main" id="{D408FFC8-52BA-49A9-8369-151199A1C78D}"/>
               </a:ext>
             </a:extLst>
           </p:cNvPr>
@@ -11538,7 +11738,7 @@
           <p:cNvPr id="13" name="">
             <a:extLst xmlns:a="http://schemas.openxmlformats.org/drawingml/2006/main">
               <a:ext uri="{FF2B5EF4-FFF2-40B4-BE49-F238E27FC236}">
-                <a16:creationId xmlns:a16="http://schemas.microsoft.com/office/drawing/2014/main" id="{E185DE61-D494-44EE-BEFE-1AF3A687E61B}"/>
+                <a16:creationId xmlns:a16="http://schemas.microsoft.com/office/drawing/2014/main" id="{46598634-25BA-45C1-A140-20E514619755}"/>
               </a:ext>
             </a:extLst>
           </p:cNvPr>
@@ -11570,7 +11770,7 @@
           <p:cNvPr id="14" name="">
             <a:extLst xmlns:a="http://schemas.openxmlformats.org/drawingml/2006/main">
               <a:ext uri="{FF2B5EF4-FFF2-40B4-BE49-F238E27FC236}">
-                <a16:creationId xmlns:a16="http://schemas.microsoft.com/office/drawing/2014/main" id="{6EB8187B-BB52-4F52-A0B6-DD3BD415CE3A}"/>
+                <a16:creationId xmlns:a16="http://schemas.microsoft.com/office/drawing/2014/main" id="{E460E133-833B-4B2F-972E-FE421034BCBE}"/>
               </a:ext>
             </a:extLst>
           </p:cNvPr>
@@ -11627,7 +11827,7 @@
           <p:cNvPr id="15" name="">
             <a:extLst xmlns:a="http://schemas.openxmlformats.org/drawingml/2006/main">
               <a:ext uri="{FF2B5EF4-FFF2-40B4-BE49-F238E27FC236}">
-                <a16:creationId xmlns:a16="http://schemas.microsoft.com/office/drawing/2014/main" id="{D4481AF2-C8E9-4D66-B7D1-12DC3C9FE697}"/>
+                <a16:creationId xmlns:a16="http://schemas.microsoft.com/office/drawing/2014/main" id="{ED0613B5-C749-4613-89BA-9A084622BFAD}"/>
               </a:ext>
             </a:extLst>
           </p:cNvPr>
@@ -11682,7 +11882,7 @@
     </p:spTree>
     <p:extLst>
       <p:ext uri="{BB962C8B-B14F-4D97-AF65-F5344CB8AC3E}">
-        <p14:creationId xmlns:p14="http://schemas.microsoft.com/office/powerpoint/2010/main" val="140760229"/>
+        <p14:creationId xmlns:p14="http://schemas.microsoft.com/office/powerpoint/2010/main" val="1530959616"/>
       </p:ext>
     </p:extLst>
   </p:cSld>
@@ -11837,7 +12037,7 @@
           <p:cNvPr id="23" name="">
             <a:extLst xmlns:a="http://schemas.openxmlformats.org/drawingml/2006/main">
               <a:ext uri="{FF2B5EF4-FFF2-40B4-BE49-F238E27FC236}">
-                <a16:creationId xmlns:a16="http://schemas.microsoft.com/office/drawing/2014/main" id="{57DE4C08-72F2-4197-9D93-2767DE207B58}"/>
+                <a16:creationId xmlns:a16="http://schemas.microsoft.com/office/drawing/2014/main" id="{F07944EA-6F84-43F7-9B44-00CA0DCE3A8F}"/>
               </a:ext>
             </a:extLst>
           </p:cNvPr>
@@ -11869,7 +12069,7 @@
           <p:cNvPr id="2" name="">
             <a:extLst xmlns:a="http://schemas.openxmlformats.org/drawingml/2006/main">
               <a:ext uri="{FF2B5EF4-FFF2-40B4-BE49-F238E27FC236}">
-                <a16:creationId xmlns:a16="http://schemas.microsoft.com/office/drawing/2014/main" id="{2323B1D9-ECED-4211-B54F-22DEC40700D3}"/>
+                <a16:creationId xmlns:a16="http://schemas.microsoft.com/office/drawing/2014/main" id="{AE60FE4D-93AF-49AE-8F98-69790DBF968C}"/>
               </a:ext>
             </a:extLst>
           </p:cNvPr>
@@ -11926,7 +12126,7 @@
           <p:cNvPr id="3" name="">
             <a:extLst xmlns:a="http://schemas.openxmlformats.org/drawingml/2006/main">
               <a:ext uri="{FF2B5EF4-FFF2-40B4-BE49-F238E27FC236}">
-                <a16:creationId xmlns:a16="http://schemas.microsoft.com/office/drawing/2014/main" id="{AE9D5880-2E4E-4F08-A22D-C73806A6E672}"/>
+                <a16:creationId xmlns:a16="http://schemas.microsoft.com/office/drawing/2014/main" id="{EAB95362-8C2A-41B4-95EE-00F4207D557A}"/>
               </a:ext>
             </a:extLst>
           </p:cNvPr>
@@ -11958,7 +12158,7 @@
           <p:cNvPr id="4" name="">
             <a:extLst xmlns:a="http://schemas.openxmlformats.org/drawingml/2006/main">
               <a:ext uri="{FF2B5EF4-FFF2-40B4-BE49-F238E27FC236}">
-                <a16:creationId xmlns:a16="http://schemas.microsoft.com/office/drawing/2014/main" id="{9DDFB225-129E-4233-983C-8825614827BE}"/>
+                <a16:creationId xmlns:a16="http://schemas.microsoft.com/office/drawing/2014/main" id="{553417A4-0A28-4CF0-BF91-E0CCF5A90EDD}"/>
               </a:ext>
             </a:extLst>
           </p:cNvPr>
@@ -12015,7 +12215,7 @@
           <p:cNvPr id="5" name="">
             <a:extLst xmlns:a="http://schemas.openxmlformats.org/drawingml/2006/main">
               <a:ext uri="{FF2B5EF4-FFF2-40B4-BE49-F238E27FC236}">
-                <a16:creationId xmlns:a16="http://schemas.microsoft.com/office/drawing/2014/main" id="{DF2A388E-7702-4B39-887F-5978355130A1}"/>
+                <a16:creationId xmlns:a16="http://schemas.microsoft.com/office/drawing/2014/main" id="{A71E6C5B-7C13-4E6C-A453-55A33ED3415B}"/>
               </a:ext>
             </a:extLst>
           </p:cNvPr>
@@ -12072,7 +12272,7 @@
           <p:cNvPr id="6" name="">
             <a:extLst xmlns:a="http://schemas.openxmlformats.org/drawingml/2006/main">
               <a:ext uri="{FF2B5EF4-FFF2-40B4-BE49-F238E27FC236}">
-                <a16:creationId xmlns:a16="http://schemas.microsoft.com/office/drawing/2014/main" id="{4EA90907-8905-4619-85A8-C9ACC9861A16}"/>
+                <a16:creationId xmlns:a16="http://schemas.microsoft.com/office/drawing/2014/main" id="{D2ACAD8E-D13C-4E2E-A3E3-144DD0C0A12A}"/>
               </a:ext>
             </a:extLst>
           </p:cNvPr>
@@ -12129,7 +12329,7 @@
           <p:cNvPr id="7" name="">
             <a:extLst xmlns:a="http://schemas.openxmlformats.org/drawingml/2006/main">
               <a:ext uri="{FF2B5EF4-FFF2-40B4-BE49-F238E27FC236}">
-                <a16:creationId xmlns:a16="http://schemas.microsoft.com/office/drawing/2014/main" id="{94F42E24-49FF-4F35-817B-8A5BE75B64FF}"/>
+                <a16:creationId xmlns:a16="http://schemas.microsoft.com/office/drawing/2014/main" id="{F2157C53-CDB2-49FD-9895-3E8F9FF788E1}"/>
               </a:ext>
             </a:extLst>
           </p:cNvPr>
@@ -12161,7 +12361,7 @@
           <p:cNvPr id="8" name="">
             <a:extLst xmlns:a="http://schemas.openxmlformats.org/drawingml/2006/main">
               <a:ext uri="{FF2B5EF4-FFF2-40B4-BE49-F238E27FC236}">
-                <a16:creationId xmlns:a16="http://schemas.microsoft.com/office/drawing/2014/main" id="{8C8DB0FB-DBA8-435A-80B5-13F8D5DC2782}"/>
+                <a16:creationId xmlns:a16="http://schemas.microsoft.com/office/drawing/2014/main" id="{23FBCB0E-0E84-437F-9A3B-D9013C9E1019}"/>
               </a:ext>
             </a:extLst>
           </p:cNvPr>
@@ -12218,7 +12418,7 @@
           <p:cNvPr id="9" name="">
             <a:extLst xmlns:a="http://schemas.openxmlformats.org/drawingml/2006/main">
               <a:ext uri="{FF2B5EF4-FFF2-40B4-BE49-F238E27FC236}">
-                <a16:creationId xmlns:a16="http://schemas.microsoft.com/office/drawing/2014/main" id="{8DAA330F-66FB-4A60-8CE8-438B6E5F4960}"/>
+                <a16:creationId xmlns:a16="http://schemas.microsoft.com/office/drawing/2014/main" id="{36E4DA7C-9720-4DC0-BF19-BB63B51B99CF}"/>
               </a:ext>
             </a:extLst>
           </p:cNvPr>
@@ -12275,7 +12475,7 @@
           <p:cNvPr id="10" name="">
             <a:extLst xmlns:a="http://schemas.openxmlformats.org/drawingml/2006/main">
               <a:ext uri="{FF2B5EF4-FFF2-40B4-BE49-F238E27FC236}">
-                <a16:creationId xmlns:a16="http://schemas.microsoft.com/office/drawing/2014/main" id="{F55B4BD0-C964-4C09-A148-B2A931717F49}"/>
+                <a16:creationId xmlns:a16="http://schemas.microsoft.com/office/drawing/2014/main" id="{EBE32F51-E7E1-4F5F-8E2A-22855633F9BE}"/>
               </a:ext>
             </a:extLst>
           </p:cNvPr>
@@ -12309,7 +12509,7 @@
           <p:cNvPr id="11" name="">
             <a:extLst xmlns:a="http://schemas.openxmlformats.org/drawingml/2006/main">
               <a:ext uri="{FF2B5EF4-FFF2-40B4-BE49-F238E27FC236}">
-                <a16:creationId xmlns:a16="http://schemas.microsoft.com/office/drawing/2014/main" id="{F7FF5903-47F6-48B8-A666-FAA4AAAED882}"/>
+                <a16:creationId xmlns:a16="http://schemas.microsoft.com/office/drawing/2014/main" id="{2246596A-CC44-4DBE-8C18-93A459484C40}"/>
               </a:ext>
             </a:extLst>
           </p:cNvPr>
@@ -12341,7 +12541,7 @@
           <p:cNvPr id="12" name="">
             <a:extLst xmlns:a="http://schemas.openxmlformats.org/drawingml/2006/main">
               <a:ext uri="{FF2B5EF4-FFF2-40B4-BE49-F238E27FC236}">
-                <a16:creationId xmlns:a16="http://schemas.microsoft.com/office/drawing/2014/main" id="{3D45A4CF-B938-4F34-83C7-6C9DF50F577E}"/>
+                <a16:creationId xmlns:a16="http://schemas.microsoft.com/office/drawing/2014/main" id="{492E2411-0E3D-48FF-9218-CFA8C8E8E2AB}"/>
               </a:ext>
             </a:extLst>
           </p:cNvPr>
@@ -12398,7 +12598,7 @@
           <p:cNvPr id="13" name="">
             <a:extLst xmlns:a="http://schemas.openxmlformats.org/drawingml/2006/main">
               <a:ext uri="{FF2B5EF4-FFF2-40B4-BE49-F238E27FC236}">
-                <a16:creationId xmlns:a16="http://schemas.microsoft.com/office/drawing/2014/main" id="{CDCA190D-EB0C-46D0-B735-62992515860D}"/>
+                <a16:creationId xmlns:a16="http://schemas.microsoft.com/office/drawing/2014/main" id="{F1BA3961-A3DC-48A2-BC31-4D3CEE9E3D3A}"/>
               </a:ext>
             </a:extLst>
           </p:cNvPr>
@@ -12455,7 +12655,7 @@
           <p:cNvPr id="14" name="">
             <a:extLst xmlns:a="http://schemas.openxmlformats.org/drawingml/2006/main">
               <a:ext uri="{FF2B5EF4-FFF2-40B4-BE49-F238E27FC236}">
-                <a16:creationId xmlns:a16="http://schemas.microsoft.com/office/drawing/2014/main" id="{6D7D7F03-0921-4E36-AFE5-571D51E01A4B}"/>
+                <a16:creationId xmlns:a16="http://schemas.microsoft.com/office/drawing/2014/main" id="{69C38EBA-89E9-4111-ADCA-F39A11B3493A}"/>
               </a:ext>
             </a:extLst>
           </p:cNvPr>
@@ -12489,7 +12689,7 @@
           <p:cNvPr id="15" name="">
             <a:extLst xmlns:a="http://schemas.openxmlformats.org/drawingml/2006/main">
               <a:ext uri="{FF2B5EF4-FFF2-40B4-BE49-F238E27FC236}">
-                <a16:creationId xmlns:a16="http://schemas.microsoft.com/office/drawing/2014/main" id="{39C726B9-4AF0-4A35-87E7-EA6733FE386F}"/>
+                <a16:creationId xmlns:a16="http://schemas.microsoft.com/office/drawing/2014/main" id="{2BB17C14-02EF-4896-A658-6E14B2E0306D}"/>
               </a:ext>
             </a:extLst>
           </p:cNvPr>
@@ -12521,7 +12721,7 @@
           <p:cNvPr id="16" name="">
             <a:extLst xmlns:a="http://schemas.openxmlformats.org/drawingml/2006/main">
               <a:ext uri="{FF2B5EF4-FFF2-40B4-BE49-F238E27FC236}">
-                <a16:creationId xmlns:a16="http://schemas.microsoft.com/office/drawing/2014/main" id="{9893305D-1392-4484-8BA3-3A006C9B2853}"/>
+                <a16:creationId xmlns:a16="http://schemas.microsoft.com/office/drawing/2014/main" id="{4A6AA141-649E-4238-A347-59260E7269EC}"/>
               </a:ext>
             </a:extLst>
           </p:cNvPr>
@@ -12578,7 +12778,7 @@
           <p:cNvPr id="17" name="">
             <a:extLst xmlns:a="http://schemas.openxmlformats.org/drawingml/2006/main">
               <a:ext uri="{FF2B5EF4-FFF2-40B4-BE49-F238E27FC236}">
-                <a16:creationId xmlns:a16="http://schemas.microsoft.com/office/drawing/2014/main" id="{5A308E73-B1E6-48D3-84AC-F34B4F2CC02E}"/>
+                <a16:creationId xmlns:a16="http://schemas.microsoft.com/office/drawing/2014/main" id="{F2264DF8-5F92-443E-9B3E-9879BC72678B}"/>
               </a:ext>
             </a:extLst>
           </p:cNvPr>
@@ -12635,7 +12835,7 @@
           <p:cNvPr id="18" name="">
             <a:extLst xmlns:a="http://schemas.openxmlformats.org/drawingml/2006/main">
               <a:ext uri="{FF2B5EF4-FFF2-40B4-BE49-F238E27FC236}">
-                <a16:creationId xmlns:a16="http://schemas.microsoft.com/office/drawing/2014/main" id="{07CCE4B0-D0D5-4D03-980B-B10A0F2E6CC6}"/>
+                <a16:creationId xmlns:a16="http://schemas.microsoft.com/office/drawing/2014/main" id="{BC7637D0-C21C-4D27-9860-9ABA8DFA409C}"/>
               </a:ext>
             </a:extLst>
           </p:cNvPr>
@@ -12669,7 +12869,7 @@
           <p:cNvPr id="19" name="">
             <a:extLst xmlns:a="http://schemas.openxmlformats.org/drawingml/2006/main">
               <a:ext uri="{FF2B5EF4-FFF2-40B4-BE49-F238E27FC236}">
-                <a16:creationId xmlns:a16="http://schemas.microsoft.com/office/drawing/2014/main" id="{8271BCDE-67CE-4197-9135-E91C9C105EC7}"/>
+                <a16:creationId xmlns:a16="http://schemas.microsoft.com/office/drawing/2014/main" id="{B37DF0DA-755E-45C8-97E5-E8ABF7E8F4E8}"/>
               </a:ext>
             </a:extLst>
           </p:cNvPr>
@@ -12701,7 +12901,7 @@
           <p:cNvPr id="20" name="">
             <a:extLst xmlns:a="http://schemas.openxmlformats.org/drawingml/2006/main">
               <a:ext uri="{FF2B5EF4-FFF2-40B4-BE49-F238E27FC236}">
-                <a16:creationId xmlns:a16="http://schemas.microsoft.com/office/drawing/2014/main" id="{CD27748C-8014-43B6-94EB-7014A4983883}"/>
+                <a16:creationId xmlns:a16="http://schemas.microsoft.com/office/drawing/2014/main" id="{3441A3F8-37F5-42D7-9D36-BACF66A28522}"/>
               </a:ext>
             </a:extLst>
           </p:cNvPr>
@@ -12758,7 +12958,7 @@
           <p:cNvPr id="21" name="">
             <a:extLst xmlns:a="http://schemas.openxmlformats.org/drawingml/2006/main">
               <a:ext uri="{FF2B5EF4-FFF2-40B4-BE49-F238E27FC236}">
-                <a16:creationId xmlns:a16="http://schemas.microsoft.com/office/drawing/2014/main" id="{5C113959-89B9-42AF-877F-5F152E75EF3D}"/>
+                <a16:creationId xmlns:a16="http://schemas.microsoft.com/office/drawing/2014/main" id="{715444FC-B9D3-4A99-9E06-A51BD2895F3E}"/>
               </a:ext>
             </a:extLst>
           </p:cNvPr>
@@ -12815,7 +13015,7 @@
           <p:cNvPr id="22" name="">
             <a:extLst xmlns:a="http://schemas.openxmlformats.org/drawingml/2006/main">
               <a:ext uri="{FF2B5EF4-FFF2-40B4-BE49-F238E27FC236}">
-                <a16:creationId xmlns:a16="http://schemas.microsoft.com/office/drawing/2014/main" id="{2E2D2EBE-E158-4DB9-85DB-4819E7B6AD70}"/>
+                <a16:creationId xmlns:a16="http://schemas.microsoft.com/office/drawing/2014/main" id="{A021F4CD-3556-4C9E-96CE-E89FC10E407F}"/>
               </a:ext>
             </a:extLst>
           </p:cNvPr>
@@ -12870,7 +13070,7 @@
     </p:spTree>
     <p:extLst>
       <p:ext uri="{BB962C8B-B14F-4D97-AF65-F5344CB8AC3E}">
-        <p14:creationId xmlns:p14="http://schemas.microsoft.com/office/powerpoint/2010/main" val="1758898013"/>
+        <p14:creationId xmlns:p14="http://schemas.microsoft.com/office/powerpoint/2010/main" val="1751643365"/>
       </p:ext>
     </p:extLst>
   </p:cSld>
@@ -13071,7 +13271,7 @@
           <p:cNvPr id="22" name="">
             <a:extLst xmlns:a="http://schemas.openxmlformats.org/drawingml/2006/main">
               <a:ext uri="{FF2B5EF4-FFF2-40B4-BE49-F238E27FC236}">
-                <a16:creationId xmlns:a16="http://schemas.microsoft.com/office/drawing/2014/main" id="{DA0B5938-ED88-48C4-A30E-BFAE09C0727D}"/>
+                <a16:creationId xmlns:a16="http://schemas.microsoft.com/office/drawing/2014/main" id="{D665383B-0743-4AD7-944B-80D64927147D}"/>
               </a:ext>
             </a:extLst>
           </p:cNvPr>
@@ -13103,7 +13303,7 @@
           <p:cNvPr id="2" name="">
             <a:extLst xmlns:a="http://schemas.openxmlformats.org/drawingml/2006/main">
               <a:ext uri="{FF2B5EF4-FFF2-40B4-BE49-F238E27FC236}">
-                <a16:creationId xmlns:a16="http://schemas.microsoft.com/office/drawing/2014/main" id="{8D26EE15-806F-4CA5-8BD4-1CEF08787B98}"/>
+                <a16:creationId xmlns:a16="http://schemas.microsoft.com/office/drawing/2014/main" id="{73F85659-C269-4D00-BD5A-6843457856D4}"/>
               </a:ext>
             </a:extLst>
           </p:cNvPr>
@@ -13160,7 +13360,7 @@
           <p:cNvPr id="3" name="">
             <a:extLst xmlns:a="http://schemas.openxmlformats.org/drawingml/2006/main">
               <a:ext uri="{FF2B5EF4-FFF2-40B4-BE49-F238E27FC236}">
-                <a16:creationId xmlns:a16="http://schemas.microsoft.com/office/drawing/2014/main" id="{3298CB61-97F4-4F2B-979F-7DB7B7D51C15}"/>
+                <a16:creationId xmlns:a16="http://schemas.microsoft.com/office/drawing/2014/main" id="{146F4F25-F748-4893-85F2-75A5E21372C9}"/>
               </a:ext>
             </a:extLst>
           </p:cNvPr>
@@ -13192,7 +13392,7 @@
           <p:cNvPr id="4" name="">
             <a:extLst xmlns:a="http://schemas.openxmlformats.org/drawingml/2006/main">
               <a:ext uri="{FF2B5EF4-FFF2-40B4-BE49-F238E27FC236}">
-                <a16:creationId xmlns:a16="http://schemas.microsoft.com/office/drawing/2014/main" id="{03512349-B72C-4005-9BFE-287241216C2A}"/>
+                <a16:creationId xmlns:a16="http://schemas.microsoft.com/office/drawing/2014/main" id="{46F9C347-8EB2-41C2-97FD-5DF7E5CDB187}"/>
               </a:ext>
             </a:extLst>
           </p:cNvPr>
@@ -13249,7 +13449,7 @@
           <p:cNvPr id="5" name="">
             <a:extLst xmlns:a="http://schemas.openxmlformats.org/drawingml/2006/main">
               <a:ext uri="{FF2B5EF4-FFF2-40B4-BE49-F238E27FC236}">
-                <a16:creationId xmlns:a16="http://schemas.microsoft.com/office/drawing/2014/main" id="{87C3907E-B020-4AF6-9844-204525EE4EA9}"/>
+                <a16:creationId xmlns:a16="http://schemas.microsoft.com/office/drawing/2014/main" id="{D9626B9C-1E07-4658-BE1B-FB15A3AD21B2}"/>
               </a:ext>
             </a:extLst>
           </p:cNvPr>
@@ -13306,7 +13506,7 @@
           <p:cNvPr id="6" name="">
             <a:extLst xmlns:a="http://schemas.openxmlformats.org/drawingml/2006/main">
               <a:ext uri="{FF2B5EF4-FFF2-40B4-BE49-F238E27FC236}">
-                <a16:creationId xmlns:a16="http://schemas.microsoft.com/office/drawing/2014/main" id="{AEE03085-75C8-4D10-9C2F-01A47B125CFE}"/>
+                <a16:creationId xmlns:a16="http://schemas.microsoft.com/office/drawing/2014/main" id="{70544B9C-D0BF-434E-80AA-EBE57EE84EE9}"/>
               </a:ext>
             </a:extLst>
           </p:cNvPr>
@@ -13363,7 +13563,7 @@
           <p:cNvPr id="7" name="">
             <a:extLst xmlns:a="http://schemas.openxmlformats.org/drawingml/2006/main">
               <a:ext uri="{FF2B5EF4-FFF2-40B4-BE49-F238E27FC236}">
-                <a16:creationId xmlns:a16="http://schemas.microsoft.com/office/drawing/2014/main" id="{15EB05AC-9947-4E69-BFE4-4E4B3FE4923F}"/>
+                <a16:creationId xmlns:a16="http://schemas.microsoft.com/office/drawing/2014/main" id="{552A9C68-4413-4976-B211-93B88243D47C}"/>
               </a:ext>
             </a:extLst>
           </p:cNvPr>
@@ -13395,7 +13595,7 @@
           <p:cNvPr id="8" name="">
             <a:extLst xmlns:a="http://schemas.openxmlformats.org/drawingml/2006/main">
               <a:ext uri="{FF2B5EF4-FFF2-40B4-BE49-F238E27FC236}">
-                <a16:creationId xmlns:a16="http://schemas.microsoft.com/office/drawing/2014/main" id="{BAB4A42E-261A-43BB-B546-544FD0AABF7D}"/>
+                <a16:creationId xmlns:a16="http://schemas.microsoft.com/office/drawing/2014/main" id="{30994F27-26A6-4AF0-BED2-AD072F855E4F}"/>
               </a:ext>
             </a:extLst>
           </p:cNvPr>
@@ -13452,7 +13652,7 @@
           <p:cNvPr id="9" name="">
             <a:extLst xmlns:a="http://schemas.openxmlformats.org/drawingml/2006/main">
               <a:ext uri="{FF2B5EF4-FFF2-40B4-BE49-F238E27FC236}">
-                <a16:creationId xmlns:a16="http://schemas.microsoft.com/office/drawing/2014/main" id="{B8F61F78-CE52-49F2-9BE6-1786BB579B42}"/>
+                <a16:creationId xmlns:a16="http://schemas.microsoft.com/office/drawing/2014/main" id="{A7E7CE41-2E9C-4247-96F4-27FBD20E6B41}"/>
               </a:ext>
             </a:extLst>
           </p:cNvPr>
@@ -13509,7 +13709,7 @@
           <p:cNvPr id="10" name="">
             <a:extLst xmlns:a="http://schemas.openxmlformats.org/drawingml/2006/main">
               <a:ext uri="{FF2B5EF4-FFF2-40B4-BE49-F238E27FC236}">
-                <a16:creationId xmlns:a16="http://schemas.microsoft.com/office/drawing/2014/main" id="{7BBC69D2-0E9A-4330-B9F8-5EDF605975DB}"/>
+                <a16:creationId xmlns:a16="http://schemas.microsoft.com/office/drawing/2014/main" id="{A8F03DB8-4538-478C-8A8B-C5588309069E}"/>
               </a:ext>
             </a:extLst>
           </p:cNvPr>
@@ -13543,7 +13743,7 @@
           <p:cNvPr id="11" name="">
             <a:extLst xmlns:a="http://schemas.openxmlformats.org/drawingml/2006/main">
               <a:ext uri="{FF2B5EF4-FFF2-40B4-BE49-F238E27FC236}">
-                <a16:creationId xmlns:a16="http://schemas.microsoft.com/office/drawing/2014/main" id="{C4FEBA3A-EEB3-4788-A58A-8A72BEB067DB}"/>
+                <a16:creationId xmlns:a16="http://schemas.microsoft.com/office/drawing/2014/main" id="{24B782C0-9FA1-4820-9509-97137F592DC0}"/>
               </a:ext>
             </a:extLst>
           </p:cNvPr>
@@ -13575,7 +13775,7 @@
           <p:cNvPr id="12" name="">
             <a:extLst xmlns:a="http://schemas.openxmlformats.org/drawingml/2006/main">
               <a:ext uri="{FF2B5EF4-FFF2-40B4-BE49-F238E27FC236}">
-                <a16:creationId xmlns:a16="http://schemas.microsoft.com/office/drawing/2014/main" id="{63A4F93F-5DEB-4BFE-A2F5-3D9B381E9063}"/>
+                <a16:creationId xmlns:a16="http://schemas.microsoft.com/office/drawing/2014/main" id="{520C1D86-71FC-42BC-9E85-E0B3E19F0EF4}"/>
               </a:ext>
             </a:extLst>
           </p:cNvPr>
@@ -13632,7 +13832,7 @@
           <p:cNvPr id="13" name="">
             <a:extLst xmlns:a="http://schemas.openxmlformats.org/drawingml/2006/main">
               <a:ext uri="{FF2B5EF4-FFF2-40B4-BE49-F238E27FC236}">
-                <a16:creationId xmlns:a16="http://schemas.microsoft.com/office/drawing/2014/main" id="{E31A076E-3F69-45DD-9C52-13E3B0793C15}"/>
+                <a16:creationId xmlns:a16="http://schemas.microsoft.com/office/drawing/2014/main" id="{289865DC-8BC0-4FE4-B2B7-8BD4EB36DF90}"/>
               </a:ext>
             </a:extLst>
           </p:cNvPr>
@@ -13689,7 +13889,7 @@
           <p:cNvPr id="14" name="">
             <a:extLst xmlns:a="http://schemas.openxmlformats.org/drawingml/2006/main">
               <a:ext uri="{FF2B5EF4-FFF2-40B4-BE49-F238E27FC236}">
-                <a16:creationId xmlns:a16="http://schemas.microsoft.com/office/drawing/2014/main" id="{5D0254D1-0396-497A-85A9-C5126BCEEF9B}"/>
+                <a16:creationId xmlns:a16="http://schemas.microsoft.com/office/drawing/2014/main" id="{2FDBBFBE-DEC2-4283-9B3C-DE5A11C51C87}"/>
               </a:ext>
             </a:extLst>
           </p:cNvPr>
@@ -13723,7 +13923,7 @@
           <p:cNvPr id="15" name="">
             <a:extLst xmlns:a="http://schemas.openxmlformats.org/drawingml/2006/main">
               <a:ext uri="{FF2B5EF4-FFF2-40B4-BE49-F238E27FC236}">
-                <a16:creationId xmlns:a16="http://schemas.microsoft.com/office/drawing/2014/main" id="{31F8A103-E6E0-4EA5-BC58-47D0E5123512}"/>
+                <a16:creationId xmlns:a16="http://schemas.microsoft.com/office/drawing/2014/main" id="{8CBB5ABF-613E-4EE4-B6BF-CD6C3F4D9CA8}"/>
               </a:ext>
             </a:extLst>
           </p:cNvPr>
@@ -13755,7 +13955,7 @@
           <p:cNvPr id="16" name="">
             <a:extLst xmlns:a="http://schemas.openxmlformats.org/drawingml/2006/main">
               <a:ext uri="{FF2B5EF4-FFF2-40B4-BE49-F238E27FC236}">
-                <a16:creationId xmlns:a16="http://schemas.microsoft.com/office/drawing/2014/main" id="{9AA5BC55-4B79-433D-8F3A-B827B1D6BBB1}"/>
+                <a16:creationId xmlns:a16="http://schemas.microsoft.com/office/drawing/2014/main" id="{190C9A25-35AF-4CC2-8B00-D59249E8BC6A}"/>
               </a:ext>
             </a:extLst>
           </p:cNvPr>
@@ -13812,7 +14012,7 @@
           <p:cNvPr id="17" name="">
             <a:extLst xmlns:a="http://schemas.openxmlformats.org/drawingml/2006/main">
               <a:ext uri="{FF2B5EF4-FFF2-40B4-BE49-F238E27FC236}">
-                <a16:creationId xmlns:a16="http://schemas.microsoft.com/office/drawing/2014/main" id="{BE82EB48-BB0B-45ED-BF3D-7238FA5958D3}"/>
+                <a16:creationId xmlns:a16="http://schemas.microsoft.com/office/drawing/2014/main" id="{1BDBF532-2556-4D82-BD20-A497050EB386}"/>
               </a:ext>
             </a:extLst>
           </p:cNvPr>
@@ -13869,7 +14069,7 @@
           <p:cNvPr id="18" name="">
             <a:extLst xmlns:a="http://schemas.openxmlformats.org/drawingml/2006/main">
               <a:ext uri="{FF2B5EF4-FFF2-40B4-BE49-F238E27FC236}">
-                <a16:creationId xmlns:a16="http://schemas.microsoft.com/office/drawing/2014/main" id="{22BA9232-8819-49D3-B2C5-046283228F28}"/>
+                <a16:creationId xmlns:a16="http://schemas.microsoft.com/office/drawing/2014/main" id="{C331B6EF-B988-4261-B698-32766CAE575B}"/>
               </a:ext>
             </a:extLst>
           </p:cNvPr>
@@ -13903,7 +14103,7 @@
           <p:cNvPr id="19" name="">
             <a:extLst xmlns:a="http://schemas.openxmlformats.org/drawingml/2006/main">
               <a:ext uri="{FF2B5EF4-FFF2-40B4-BE49-F238E27FC236}">
-                <a16:creationId xmlns:a16="http://schemas.microsoft.com/office/drawing/2014/main" id="{5A4FF654-B366-4C88-8F18-6BD100244101}"/>
+                <a16:creationId xmlns:a16="http://schemas.microsoft.com/office/drawing/2014/main" id="{1FFBF715-5591-4138-A0D0-9FE212D75973}"/>
               </a:ext>
             </a:extLst>
           </p:cNvPr>
@@ -13935,7 +14135,7 @@
           <p:cNvPr id="20" name="">
             <a:extLst xmlns:a="http://schemas.openxmlformats.org/drawingml/2006/main">
               <a:ext uri="{FF2B5EF4-FFF2-40B4-BE49-F238E27FC236}">
-                <a16:creationId xmlns:a16="http://schemas.microsoft.com/office/drawing/2014/main" id="{7A19630A-7048-46DB-B2F2-27AA3ADB0A9C}"/>
+                <a16:creationId xmlns:a16="http://schemas.microsoft.com/office/drawing/2014/main" id="{3C72E070-AB2A-4848-A307-C8982FF37EA8}"/>
               </a:ext>
             </a:extLst>
           </p:cNvPr>
@@ -13992,7 +14192,7 @@
           <p:cNvPr id="21" name="">
             <a:extLst xmlns:a="http://schemas.openxmlformats.org/drawingml/2006/main">
               <a:ext uri="{FF2B5EF4-FFF2-40B4-BE49-F238E27FC236}">
-                <a16:creationId xmlns:a16="http://schemas.microsoft.com/office/drawing/2014/main" id="{987CD2AC-BE26-4816-A2EE-BC4ED4086FEF}"/>
+                <a16:creationId xmlns:a16="http://schemas.microsoft.com/office/drawing/2014/main" id="{FEDED40D-C5EE-47A3-9862-744B422038CF}"/>
               </a:ext>
             </a:extLst>
           </p:cNvPr>
@@ -14047,7 +14247,7 @@
     </p:spTree>
     <p:extLst>
       <p:ext uri="{BB962C8B-B14F-4D97-AF65-F5344CB8AC3E}">
-        <p14:creationId xmlns:p14="http://schemas.microsoft.com/office/powerpoint/2010/main" val="536981633"/>
+        <p14:creationId xmlns:p14="http://schemas.microsoft.com/office/powerpoint/2010/main" val="724259375"/>
       </p:ext>
     </p:extLst>
   </p:cSld>
